--- a/WorldClimate_v2.pptx
+++ b/WorldClimate_v2.pptx
@@ -5,7 +5,7 @@
     <p:sldMasterId id="2147483648" r:id="rId1"/>
   </p:sldMasterIdLst>
   <p:notesMasterIdLst>
-    <p:notesMasterId r:id="rId17"/>
+    <p:notesMasterId r:id="rId16"/>
   </p:notesMasterIdLst>
   <p:sldIdLst>
     <p:sldId id="256" r:id="rId2"/>
@@ -20,9 +20,8 @@
     <p:sldId id="265" r:id="rId11"/>
     <p:sldId id="266" r:id="rId12"/>
     <p:sldId id="267" r:id="rId13"/>
-    <p:sldId id="268" r:id="rId14"/>
-    <p:sldId id="269" r:id="rId15"/>
-    <p:sldId id="270" r:id="rId16"/>
+    <p:sldId id="269" r:id="rId14"/>
+    <p:sldId id="270" r:id="rId15"/>
   </p:sldIdLst>
   <p:sldSz cx="9144000" cy="5143500" type="screen16x9"/>
   <p:notesSz cx="5143500" cy="9144000"/>
@@ -672,7 +671,50 @@
           <a:bodyPr/>
           <a:lstStyle/>
           <a:p>
-            <a:endParaRPr lang="en-US" dirty="0"/>
+            <a:r>
+              <a:rPr lang="en-US" dirty="0"/>
+              <a:t>"Today I'm going to present a 2018 study by Rooney-</a:t>
+            </a:r>
+            <a:r>
+              <a:rPr lang="en-US" dirty="0" err="1"/>
+              <a:t>Varga</a:t>
+            </a:r>
+            <a:r>
+              <a:rPr lang="en-US" dirty="0"/>
+              <a:t> and colleagues, published in PLOS ONE. The paper asks a simple but important question: why do information campaigns about climate change fail, and what can we do differently?" Bir </a:t>
+            </a:r>
+            <a:r>
+              <a:rPr lang="en-US" dirty="0" err="1"/>
+              <a:t>cümleyle</a:t>
+            </a:r>
+            <a:r>
+              <a:rPr lang="en-US" dirty="0"/>
+              <a:t> </a:t>
+            </a:r>
+            <a:r>
+              <a:rPr lang="en-US" dirty="0" err="1"/>
+              <a:t>metodun</a:t>
+            </a:r>
+            <a:r>
+              <a:rPr lang="en-US" dirty="0"/>
+              <a:t> </a:t>
+            </a:r>
+            <a:r>
+              <a:rPr lang="en-US" dirty="0" err="1"/>
+              <a:t>adını</a:t>
+            </a:r>
+            <a:r>
+              <a:rPr lang="en-US" dirty="0"/>
+              <a:t> </a:t>
+            </a:r>
+            <a:r>
+              <a:rPr lang="en-US" dirty="0" err="1"/>
+              <a:t>söyle</a:t>
+            </a:r>
+            <a:r>
+              <a:rPr lang="en-US" dirty="0"/>
+              <a:t>: "The answer they propose is a simulation-based action research approach."</a:t>
+            </a:r>
           </a:p>
         </p:txBody>
       </p:sp>
@@ -756,7 +798,10 @@
           <a:bodyPr/>
           <a:lstStyle/>
           <a:p>
-            <a:endParaRPr lang="en-US" dirty="0"/>
+            <a:r>
+              <a:rPr lang="en-US" dirty="0"/>
+              <a:t>"To understand why World Climate works, we need to look at the theory behind it. Three learning mechanisms are activated simultaneously. First, experiential learning — participants don't sit and listen, they make decisions and see the consequences. Second, affective engagement — the simulation triggers real emotions. Seeing your negotiation result in 3.5 degrees of warming in real time is not the same as reading about it in a report. Third, social learning — you are negotiating face to face with other people, watching them commit, argue, and react. That social pressure is a powerful motivator. No lecture activates all three of these at once. World Climate does."</a:t>
+            </a:r>
           </a:p>
         </p:txBody>
       </p:sp>
@@ -840,7 +885,124 @@
           <a:bodyPr/>
           <a:lstStyle/>
           <a:p>
-            <a:endParaRPr lang="en-US" dirty="0"/>
+            <a:r>
+              <a:rPr lang="en-US" b="1" dirty="0"/>
+              <a:t>Validity</a:t>
+            </a:r>
+            <a:r>
+              <a:rPr lang="en-US" dirty="0"/>
+              <a:t> </a:t>
+            </a:r>
+            <a:r>
+              <a:rPr lang="en-US" dirty="0" err="1"/>
+              <a:t>Hızlı</a:t>
+            </a:r>
+            <a:r>
+              <a:rPr lang="en-US" dirty="0"/>
+              <a:t> ama net </a:t>
+            </a:r>
+            <a:r>
+              <a:rPr lang="en-US" dirty="0" err="1"/>
+              <a:t>geç</a:t>
+            </a:r>
+            <a:r>
+              <a:rPr lang="en-US" dirty="0"/>
+              <a:t>. "The authors were aware of two threats to their findings, and they addressed both." Her </a:t>
+            </a:r>
+            <a:r>
+              <a:rPr lang="en-US" dirty="0" err="1"/>
+              <a:t>kartı</a:t>
+            </a:r>
+            <a:r>
+              <a:rPr lang="en-US" dirty="0"/>
+              <a:t> </a:t>
+            </a:r>
+            <a:r>
+              <a:rPr lang="en-US" dirty="0" err="1"/>
+              <a:t>oku</a:t>
+            </a:r>
+            <a:r>
+              <a:rPr lang="en-US" dirty="0"/>
+              <a:t>, </a:t>
+            </a:r>
+            <a:r>
+              <a:rPr lang="en-US" dirty="0" err="1"/>
+              <a:t>çözümü</a:t>
+            </a:r>
+            <a:r>
+              <a:rPr lang="en-US" dirty="0"/>
+              <a:t> </a:t>
+            </a:r>
+            <a:r>
+              <a:rPr lang="en-US" dirty="0" err="1"/>
+              <a:t>söyle</a:t>
+            </a:r>
+            <a:r>
+              <a:rPr lang="en-US" dirty="0"/>
+              <a:t>. Verdict </a:t>
+            </a:r>
+            <a:r>
+              <a:rPr lang="en-US" dirty="0" err="1"/>
+              <a:t>cümlesini</a:t>
+            </a:r>
+            <a:r>
+              <a:rPr lang="en-US" dirty="0"/>
+              <a:t> </a:t>
+            </a:r>
+            <a:r>
+              <a:rPr lang="en-US" dirty="0" err="1"/>
+              <a:t>vurgula</a:t>
+            </a:r>
+            <a:r>
+              <a:rPr lang="en-US" dirty="0"/>
+              <a:t>. Bu </a:t>
+            </a:r>
+            <a:r>
+              <a:rPr lang="en-US" dirty="0" err="1"/>
+              <a:t>slayt</a:t>
+            </a:r>
+            <a:r>
+              <a:rPr lang="en-US" dirty="0"/>
+              <a:t> </a:t>
+            </a:r>
+            <a:r>
+              <a:rPr lang="en-US" dirty="0" err="1"/>
+              <a:t>güvenilirlik</a:t>
+            </a:r>
+            <a:r>
+              <a:rPr lang="en-US" dirty="0"/>
+              <a:t> </a:t>
+            </a:r>
+            <a:r>
+              <a:rPr lang="en-US" dirty="0" err="1"/>
+              <a:t>hissi</a:t>
+            </a:r>
+            <a:r>
+              <a:rPr lang="en-US" dirty="0"/>
+              <a:t> </a:t>
+            </a:r>
+            <a:r>
+              <a:rPr lang="en-US" dirty="0" err="1"/>
+              <a:t>verir</a:t>
+            </a:r>
+            <a:r>
+              <a:rPr lang="en-US" dirty="0"/>
+              <a:t> — </a:t>
+            </a:r>
+            <a:r>
+              <a:rPr lang="en-US" dirty="0" err="1"/>
+              <a:t>atlamayın</a:t>
+            </a:r>
+            <a:r>
+              <a:rPr lang="en-US" dirty="0"/>
+              <a:t>.</a:t>
+            </a:r>
+          </a:p>
+          <a:p>
+            <a:r>
+              <a:rPr lang="en-US" dirty="0"/>
+              <a:t>"The second threat is that facilitators collected their own data, which could introduce bias. The authors addressed this by removing sessions with low response rates — and the findings held."</a:t>
+            </a:r>
           </a:p>
         </p:txBody>
       </p:sp>
@@ -924,7 +1086,70 @@
           <a:bodyPr/>
           <a:lstStyle/>
           <a:p>
-            <a:endParaRPr lang="en-US" dirty="0"/>
+            <a:r>
+              <a:rPr lang="en-US" b="1" dirty="0"/>
+              <a:t>Limitations &amp; Future Directions</a:t>
+            </a:r>
+            <a:r>
+              <a:rPr lang="en-US" dirty="0"/>
+              <a:t> Sol </a:t>
+            </a:r>
+            <a:r>
+              <a:rPr lang="en-US" dirty="0" err="1"/>
+              <a:t>sütun</a:t>
+            </a:r>
+            <a:r>
+              <a:rPr lang="en-US" dirty="0"/>
+              <a:t> </a:t>
+            </a:r>
+            <a:r>
+              <a:rPr lang="en-US" dirty="0" err="1"/>
+              <a:t>için</a:t>
+            </a:r>
+            <a:r>
+              <a:rPr lang="en-US" dirty="0"/>
+              <a:t>: "No study is perfect. The biggest gap here is that they only measured intent — not actual </a:t>
+            </a:r>
+            <a:r>
+              <a:rPr lang="en-US" dirty="0" err="1"/>
+              <a:t>behaviour</a:t>
+            </a:r>
+            <a:r>
+              <a:rPr lang="en-US" dirty="0"/>
+              <a:t>." </a:t>
+            </a:r>
+            <a:r>
+              <a:rPr lang="en-US" dirty="0" err="1"/>
+              <a:t>Sağ</a:t>
+            </a:r>
+            <a:r>
+              <a:rPr lang="en-US" dirty="0"/>
+              <a:t> </a:t>
+            </a:r>
+            <a:r>
+              <a:rPr lang="en-US" dirty="0" err="1"/>
+              <a:t>sütun</a:t>
+            </a:r>
+            <a:r>
+              <a:rPr lang="en-US" dirty="0"/>
+              <a:t> </a:t>
+            </a:r>
+            <a:r>
+              <a:rPr lang="en-US" dirty="0" err="1"/>
+              <a:t>için</a:t>
+            </a:r>
+            <a:r>
+              <a:rPr lang="en-US" dirty="0"/>
+              <a:t>: "But the future directions are strong — especially RCTs and </a:t>
+            </a:r>
+            <a:r>
+              <a:rPr lang="en-US" dirty="0" err="1"/>
+              <a:t>behavioural</a:t>
+            </a:r>
+            <a:r>
+              <a:rPr lang="en-US" dirty="0"/>
+              <a:t> follow-up, which would make this evidence much more compelling."</a:t>
+            </a:r>
           </a:p>
         </p:txBody>
       </p:sp>
@@ -1132,90 +1357,6 @@
 </p:notes>
 </file>
 
-<file path=ppt/notesSlides/notesSlide15.xml><?xml version="1.0" encoding="utf-8"?>
-<p:notes xmlns:a="http://schemas.openxmlformats.org/drawingml/2006/main" xmlns:r="http://schemas.openxmlformats.org/officeDocument/2006/relationships" xmlns:p="http://schemas.openxmlformats.org/presentationml/2006/main">
-  <p:cSld>
-    <p:spTree>
-      <p:nvGrpSpPr>
-        <p:cNvPr id="1" name=""/>
-        <p:cNvGrpSpPr/>
-        <p:nvPr/>
-      </p:nvGrpSpPr>
-      <p:grpSpPr>
-        <a:xfrm>
-          <a:off x="0" y="0"/>
-          <a:ext cx="0" cy="0"/>
-          <a:chOff x="0" y="0"/>
-          <a:chExt cx="0" cy="0"/>
-        </a:xfrm>
-      </p:grpSpPr>
-      <p:sp>
-        <p:nvSpPr>
-          <p:cNvPr id="2" name="Slide Image Placeholder 1"/>
-          <p:cNvSpPr>
-            <a:spLocks noGrp="1" noRot="1" noChangeAspect="1"/>
-          </p:cNvSpPr>
-          <p:nvPr>
-            <p:ph type="sldImg"/>
-          </p:nvPr>
-        </p:nvSpPr>
-        <p:spPr/>
-      </p:sp>
-      <p:sp>
-        <p:nvSpPr>
-          <p:cNvPr id="3" name="Notes Placeholder 2"/>
-          <p:cNvSpPr>
-            <a:spLocks noGrp="1"/>
-          </p:cNvSpPr>
-          <p:nvPr>
-            <p:ph type="body" idx="1"/>
-          </p:nvPr>
-        </p:nvSpPr>
-        <p:spPr/>
-        <p:txBody>
-          <a:bodyPr/>
-          <a:lstStyle/>
-          <a:p>
-            <a:endParaRPr lang="en-US" dirty="0"/>
-          </a:p>
-        </p:txBody>
-      </p:sp>
-      <p:sp>
-        <p:nvSpPr>
-          <p:cNvPr id="4" name="Slide Number Placeholder 3"/>
-          <p:cNvSpPr>
-            <a:spLocks noGrp="1"/>
-          </p:cNvSpPr>
-          <p:nvPr>
-            <p:ph type="sldNum" sz="quarter" idx="10"/>
-          </p:nvPr>
-        </p:nvSpPr>
-        <p:spPr/>
-        <p:txBody>
-          <a:bodyPr/>
-          <a:lstStyle/>
-          <a:p>
-            <a:fld id="{F7021451-1387-4CA6-816F-3879F97B5CBC}" type="slidenum">
-              <a:rPr lang="en-US"/>
-              <a:t>15</a:t>
-            </a:fld>
-            <a:endParaRPr lang="en-US"/>
-          </a:p>
-        </p:txBody>
-      </p:sp>
-    </p:spTree>
-    <p:extLst>
-      <p:ext uri="{BB962C8B-B14F-4D97-AF65-F5344CB8AC3E}">
-        <p14:creationId xmlns:p14="http://schemas.microsoft.com/office/powerpoint/2010/main" val="1024086991"/>
-      </p:ext>
-    </p:extLst>
-  </p:cSld>
-  <p:clrMapOvr>
-    <a:masterClrMapping/>
-  </p:clrMapOvr>
-</p:notes>
-</file>
-
 <file path=ppt/notesSlides/notesSlide2.xml><?xml version="1.0" encoding="utf-8"?>
 <p:notes xmlns:a="http://schemas.openxmlformats.org/drawingml/2006/main" xmlns:r="http://schemas.openxmlformats.org/officeDocument/2006/relationships" xmlns:p="http://schemas.openxmlformats.org/presentationml/2006/main">
   <p:cSld>
@@ -1260,7 +1401,10 @@
           <a:bodyPr/>
           <a:lstStyle/>
           <a:p>
-            <a:endParaRPr lang="en-US" dirty="0"/>
+            <a:r>
+              <a:rPr lang="en-US" dirty="0"/>
+              <a:t>"I'll start with the problem the authors identified, then walk through the simulation itself, the methodology, findings, and finally connect it all back to action research as a method."</a:t>
+            </a:r>
           </a:p>
         </p:txBody>
       </p:sp>
@@ -1344,7 +1488,26 @@
           <a:bodyPr/>
           <a:lstStyle/>
           <a:p>
-            <a:endParaRPr lang="en-US" dirty="0"/>
+            <a:r>
+              <a:rPr lang="en-US" dirty="0"/>
+              <a:t>"The climate system involves dozens of interacting feedback loops — humans simply cannot mentally simulate this." Affect </a:t>
+            </a:r>
+            <a:r>
+              <a:rPr lang="en-US" dirty="0" err="1"/>
+              <a:t>için</a:t>
+            </a:r>
+            <a:r>
+              <a:rPr lang="en-US" dirty="0"/>
+              <a:t>: "A PowerPoint slide showing a temperature graph does not make you feel anything. World Climate does." Social forces </a:t>
+            </a:r>
+            <a:r>
+              <a:rPr lang="en-US" dirty="0" err="1"/>
+              <a:t>için</a:t>
+            </a:r>
+            <a:r>
+              <a:rPr lang="en-US" dirty="0"/>
+              <a:t>: "If everyone in your social circle dismisses climate change, new information won't change your mind."</a:t>
+            </a:r>
           </a:p>
         </p:txBody>
       </p:sp>
@@ -1428,7 +1591,34 @@
           <a:bodyPr/>
           <a:lstStyle/>
           <a:p>
-            <a:endParaRPr lang="en-US" dirty="0"/>
+            <a:r>
+              <a:rPr lang="en-US" dirty="0"/>
+              <a:t>"Imagine you are assigned the role of China's climate negotiator. You sit across from the EU and the US. You argue about your Nationally Determined Contribution." Sonra </a:t>
+            </a:r>
+            <a:r>
+              <a:rPr lang="en-US" dirty="0" err="1"/>
+              <a:t>sağ</a:t>
+            </a:r>
+            <a:r>
+              <a:rPr lang="en-US" dirty="0"/>
+              <a:t> </a:t>
+            </a:r>
+            <a:r>
+              <a:rPr lang="en-US" dirty="0" err="1"/>
+              <a:t>sütuna</a:t>
+            </a:r>
+            <a:r>
+              <a:rPr lang="en-US" dirty="0"/>
+              <a:t> </a:t>
+            </a:r>
+            <a:r>
+              <a:rPr lang="en-US" dirty="0" err="1"/>
+              <a:t>geç</a:t>
+            </a:r>
+            <a:r>
+              <a:rPr lang="en-US" dirty="0"/>
+              <a:t>: "All those decisions get fed into C-ROADS, a real climate model used by policymakers — and within one second you see whether your agreement keeps warming below 2°C."</a:t>
+            </a:r>
           </a:p>
         </p:txBody>
       </p:sp>
@@ -1512,7 +1702,118 @@
           <a:bodyPr/>
           <a:lstStyle/>
           <a:p>
-            <a:endParaRPr lang="en-US" dirty="0"/>
+            <a:r>
+              <a:rPr lang="en-US" b="1" dirty="0"/>
+              <a:t>Methodology</a:t>
+            </a:r>
+            <a:r>
+              <a:rPr lang="en-US" dirty="0"/>
+              <a:t> </a:t>
+            </a:r>
+            <a:r>
+              <a:rPr lang="en-US" dirty="0" err="1"/>
+              <a:t>Rakamlarla</a:t>
+            </a:r>
+            <a:r>
+              <a:rPr lang="en-US" dirty="0"/>
+              <a:t> </a:t>
+            </a:r>
+            <a:r>
+              <a:rPr lang="en-US" dirty="0" err="1"/>
+              <a:t>başla</a:t>
+            </a:r>
+            <a:r>
+              <a:rPr lang="en-US" dirty="0"/>
+              <a:t>: "2,042 participants, 39 sessions, 8 nations." Sonra construct </a:t>
+            </a:r>
+            <a:r>
+              <a:rPr lang="en-US" dirty="0" err="1"/>
+              <a:t>tablosuna</a:t>
+            </a:r>
+            <a:r>
+              <a:rPr lang="en-US" dirty="0"/>
+              <a:t> </a:t>
+            </a:r>
+            <a:r>
+              <a:rPr lang="en-US" dirty="0" err="1"/>
+              <a:t>geç</a:t>
+            </a:r>
+            <a:r>
+              <a:rPr lang="en-US" dirty="0"/>
+              <a:t>: "The researchers didn't just ask 'did you learn something?' They developed four latent constructs using Exploratory Factor Analysis." Her </a:t>
+            </a:r>
+            <a:r>
+              <a:rPr lang="en-US" dirty="0" err="1"/>
+              <a:t>construct'ı</a:t>
+            </a:r>
+            <a:r>
+              <a:rPr lang="en-US" dirty="0"/>
+              <a:t> </a:t>
+            </a:r>
+            <a:r>
+              <a:rPr lang="en-US" dirty="0" err="1"/>
+              <a:t>bir</a:t>
+            </a:r>
+            <a:r>
+              <a:rPr lang="en-US" dirty="0"/>
+              <a:t> </a:t>
+            </a:r>
+            <a:r>
+              <a:rPr lang="en-US" dirty="0" err="1"/>
+              <a:t>cümleyle</a:t>
+            </a:r>
+            <a:r>
+              <a:rPr lang="en-US" dirty="0"/>
+              <a:t> </a:t>
+            </a:r>
+            <a:r>
+              <a:rPr lang="en-US" dirty="0" err="1"/>
+              <a:t>tanıt</a:t>
+            </a:r>
+            <a:r>
+              <a:rPr lang="en-US" dirty="0"/>
+              <a:t>. </a:t>
+            </a:r>
+            <a:r>
+              <a:rPr lang="en-US" dirty="0" err="1"/>
+              <a:t>En</a:t>
+            </a:r>
+            <a:r>
+              <a:rPr lang="en-US" dirty="0"/>
+              <a:t> </a:t>
+            </a:r>
+            <a:r>
+              <a:rPr lang="en-US" dirty="0" err="1"/>
+              <a:t>sona</a:t>
+            </a:r>
+            <a:r>
+              <a:rPr lang="en-US" dirty="0"/>
+              <a:t> </a:t>
+            </a:r>
+            <a:r>
+              <a:rPr lang="en-US" dirty="0" err="1"/>
+              <a:t>gelince</a:t>
+            </a:r>
+            <a:r>
+              <a:rPr lang="en-US" dirty="0"/>
+              <a:t> </a:t>
+            </a:r>
+            <a:r>
+              <a:rPr lang="en-US" dirty="0" err="1"/>
+              <a:t>şunu</a:t>
+            </a:r>
+            <a:r>
+              <a:rPr lang="en-US" dirty="0"/>
+              <a:t> </a:t>
+            </a:r>
+            <a:r>
+              <a:rPr lang="en-US" dirty="0" err="1"/>
+              <a:t>ekle</a:t>
+            </a:r>
+            <a:r>
+              <a:rPr lang="en-US" dirty="0"/>
+              <a:t>: "The key regression question was: does knowledge drive action intent, or does affect?"</a:t>
+            </a:r>
           </a:p>
         </p:txBody>
       </p:sp>
@@ -1596,7 +1897,48 @@
           <a:bodyPr/>
           <a:lstStyle/>
           <a:p>
-            <a:endParaRPr lang="en-US" dirty="0"/>
+            <a:r>
+              <a:rPr lang="en-US" dirty="0"/>
+              <a:t>"Look at Affect — it jumped from 48 to 78. Now look at the regression finding on the right: gains in affect predicted intent to act. Gains in knowledge alone did not." Bu </a:t>
+            </a:r>
+            <a:r>
+              <a:rPr lang="en-US" dirty="0" err="1"/>
+              <a:t>noktada</a:t>
+            </a:r>
+            <a:r>
+              <a:rPr lang="en-US" dirty="0"/>
+              <a:t> </a:t>
+            </a:r>
+            <a:r>
+              <a:rPr lang="en-US" dirty="0" err="1"/>
+              <a:t>bir</a:t>
+            </a:r>
+            <a:r>
+              <a:rPr lang="en-US" dirty="0"/>
+              <a:t> an dur. "That's the central finding of this paper." Sonra cross-political </a:t>
+            </a:r>
+            <a:r>
+              <a:rPr lang="en-US" dirty="0" err="1"/>
+              <a:t>bölümüne</a:t>
+            </a:r>
+            <a:r>
+              <a:rPr lang="en-US" dirty="0"/>
+              <a:t> </a:t>
+            </a:r>
+            <a:r>
+              <a:rPr lang="en-US" dirty="0" err="1"/>
+              <a:t>geç</a:t>
+            </a:r>
+            <a:r>
+              <a:rPr lang="en-US" dirty="0"/>
+              <a:t>: "And it worked equally well for participants who oppose government regulation — perhaps the hardest audience to reach.”</a:t>
+            </a:r>
+          </a:p>
+          <a:p>
+            <a:r>
+              <a:rPr lang="en-US" dirty="0"/>
+              <a:t>"The findings show statistically significant gains across all four constructs — knowledge, affect, intent to act, and desire to learn. But the most important result is not in the chart. The regression analysis revealed that gains in affect — specifically urgency and hope — predicted intent to act. Gains in knowledge alone did not. In other words, feeling matters more than knowing. What makes this even more compelling is that the gains were equally strong among participants who oppose government regulation — typically the hardest audience to reach on climate change. And the results were consistent across 8 nations and very different participant groups."</a:t>
+            </a:r>
           </a:p>
         </p:txBody>
       </p:sp>
@@ -1680,7 +2022,56 @@
           <a:bodyPr/>
           <a:lstStyle/>
           <a:p>
-            <a:endParaRPr lang="en-US" dirty="0"/>
+            <a:r>
+              <a:rPr lang="en-US" dirty="0"/>
+              <a:t>"Now let me explain why this is an action research study." </a:t>
+            </a:r>
+            <a:r>
+              <a:rPr lang="en-US" dirty="0" err="1"/>
+              <a:t>Döngüyü</a:t>
+            </a:r>
+            <a:r>
+              <a:rPr lang="en-US" dirty="0"/>
+              <a:t> </a:t>
+            </a:r>
+            <a:r>
+              <a:rPr lang="en-US" dirty="0" err="1"/>
+              <a:t>saat</a:t>
+            </a:r>
+            <a:r>
+              <a:rPr lang="en-US" dirty="0"/>
+              <a:t> </a:t>
+            </a:r>
+            <a:r>
+              <a:rPr lang="en-US" dirty="0" err="1"/>
+              <a:t>yönünde</a:t>
+            </a:r>
+            <a:r>
+              <a:rPr lang="en-US" dirty="0"/>
+              <a:t> </a:t>
+            </a:r>
+            <a:r>
+              <a:rPr lang="en-US" dirty="0" err="1"/>
+              <a:t>aç</a:t>
+            </a:r>
+            <a:r>
+              <a:rPr lang="en-US" dirty="0"/>
+              <a:t>: "They identified a clear problem — the deficit model isn't working. They designed an intervention — World Climate. They collected systematic evidence. And based on what they found — that affect matters more than knowledge — they refined the simulation to emphasize emotional engagement." Son </a:t>
+            </a:r>
+            <a:r>
+              <a:rPr lang="en-US" dirty="0" err="1"/>
+              <a:t>cümle</a:t>
+            </a:r>
+            <a:r>
+              <a:rPr lang="en-US" dirty="0"/>
+              <a:t>: "This is a textbook Diagnose → Intervene → Evaluate → Refine cycle.”</a:t>
+            </a:r>
+          </a:p>
+          <a:p>
+            <a:r>
+              <a:rPr lang="en-US" dirty="0"/>
+              <a:t>"Think of this as a story in four acts. First, the researchers saw a clear problem — climate information campaigns weren't working. Second, they designed a response — the World Climate simulation. Third, they measured the impact systematically — and found something surprising: emotion, not knowledge, drives action. Fourth, they took that finding and rebuilt the simulation around it. That's not just research — that's action research. You diagnose, you intervene, you evaluate, and you refine. And then you start again."</a:t>
+            </a:r>
           </a:p>
         </p:txBody>
       </p:sp>
@@ -1764,7 +2155,44 @@
           <a:bodyPr/>
           <a:lstStyle/>
           <a:p>
-            <a:endParaRPr lang="en-US" dirty="0"/>
+            <a:r>
+              <a:rPr lang="en-US" dirty="0"/>
+              <a:t>"This paper is a direct challenge to how most climate communicators still operate today. The message is simple: stop trying to inform people into action. Start trying to engage them emotionally.”</a:t>
+            </a:r>
+          </a:p>
+          <a:p>
+            <a:r>
+              <a:rPr lang="en-US" dirty="0"/>
+              <a:t>"Simulation is not just a fun activity. It's a serious pedagogical tool. The 'learn for yourself' effect — experiencing consequences firsthand — is far more powerful than any lecture.”</a:t>
+            </a:r>
+          </a:p>
+          <a:p>
+            <a:r>
+              <a:rPr lang="en-US" dirty="0"/>
+              <a:t>"In today's </a:t>
+            </a:r>
+            <a:r>
+              <a:rPr lang="en-US" dirty="0" err="1"/>
+              <a:t>polarised</a:t>
+            </a:r>
+            <a:r>
+              <a:rPr lang="en-US" dirty="0"/>
+              <a:t> world, this is a remarkable finding. Simulation reaches people that facts and arguments cannot — because it doesn't tell them what to think, it lets them experience the consequences themselves.”</a:t>
+            </a:r>
+          </a:p>
+          <a:p>
+            <a:r>
+              <a:rPr lang="en-US" dirty="0"/>
+              <a:t>"This is not a laboratory experiment anymore. 42,000 people in 77 countries. Officially </a:t>
+            </a:r>
+            <a:r>
+              <a:rPr lang="en-US" dirty="0" err="1"/>
+              <a:t>recognised</a:t>
+            </a:r>
+            <a:r>
+              <a:rPr lang="en-US" dirty="0"/>
+              <a:t> in France, Germany, and South Korea. Free and open source. The scale alone tells you this works beyond controlled settings."</a:t>
+            </a:r>
           </a:p>
         </p:txBody>
       </p:sp>
@@ -1848,7 +2276,70 @@
           <a:bodyPr/>
           <a:lstStyle/>
           <a:p>
-            <a:endParaRPr lang="en-US" dirty="0"/>
+            <a:r>
+              <a:rPr lang="en-US" b="1" dirty="0"/>
+              <a:t>Conclusion</a:t>
+            </a:r>
+            <a:r>
+              <a:rPr lang="en-US" dirty="0"/>
+              <a:t> </a:t>
+            </a:r>
+            <a:r>
+              <a:rPr lang="en-US" dirty="0" err="1"/>
+              <a:t>Alıntıyı</a:t>
+            </a:r>
+            <a:r>
+              <a:rPr lang="en-US" dirty="0"/>
+              <a:t> </a:t>
+            </a:r>
+            <a:r>
+              <a:rPr lang="en-US" dirty="0" err="1"/>
+              <a:t>oku</a:t>
+            </a:r>
+            <a:r>
+              <a:rPr lang="en-US" dirty="0"/>
+              <a:t>. Sonra her </a:t>
+            </a:r>
+            <a:r>
+              <a:rPr lang="en-US" dirty="0" err="1"/>
+              <a:t>bullet'ı</a:t>
+            </a:r>
+            <a:r>
+              <a:rPr lang="en-US" dirty="0"/>
+              <a:t> </a:t>
+            </a:r>
+            <a:r>
+              <a:rPr lang="en-US" dirty="0" err="1"/>
+              <a:t>tek</a:t>
+            </a:r>
+            <a:r>
+              <a:rPr lang="en-US" dirty="0"/>
+              <a:t> </a:t>
+            </a:r>
+            <a:r>
+              <a:rPr lang="en-US" dirty="0" err="1"/>
+              <a:t>cümleyle</a:t>
+            </a:r>
+            <a:r>
+              <a:rPr lang="en-US" dirty="0"/>
+              <a:t> </a:t>
+            </a:r>
+            <a:r>
+              <a:rPr lang="en-US" dirty="0" err="1"/>
+              <a:t>geç</a:t>
+            </a:r>
+            <a:r>
+              <a:rPr lang="en-US" dirty="0"/>
+              <a:t>. Son </a:t>
+            </a:r>
+            <a:r>
+              <a:rPr lang="en-US" dirty="0" err="1"/>
+              <a:t>bullet'ta</a:t>
+            </a:r>
+            <a:r>
+              <a:rPr lang="en-US" dirty="0"/>
+              <a:t> dur: "They demonstrated the full Simulation–Action Research cycle in a real-world setting. That's what makes this paper a methodological contribution, not just an education study."</a:t>
+            </a:r>
           </a:p>
         </p:txBody>
       </p:sp>
@@ -2687,7 +3178,7 @@
         </p:nvSpPr>
         <p:spPr>
           <a:xfrm>
-            <a:off x="548640" y="3337560"/>
+            <a:off x="548640" y="3502152"/>
             <a:ext cx="8046720" cy="274320"/>
           </a:xfrm>
           <a:prstGeom prst="rect">
@@ -2869,7 +3360,7 @@
             <a:r>
               <a:rPr lang="en-US" sz="2200" b="1" kern="0" spc="100" dirty="0">
                 <a:solidFill>
-                  <a:srgbClr val="FFFFFF"/>
+                  <a:sysClr val="windowText" lastClr="000000"/>
                 </a:solidFill>
                 <a:latin typeface="Calibri" pitchFamily="34" charset="0"/>
                 <a:ea typeface="Calibri" pitchFamily="34" charset="-122"/>
@@ -2877,7 +3368,11 @@
               </a:rPr>
               <a:t>THE LEARNING MODEL: HOW WORLD CLIMATE WORKS</a:t>
             </a:r>
-            <a:endParaRPr lang="en-US" sz="2200" dirty="0"/>
+            <a:endParaRPr lang="en-US" sz="2200" dirty="0">
+              <a:solidFill>
+                <a:sysClr val="windowText" lastClr="000000"/>
+              </a:solidFill>
+            </a:endParaRPr>
           </a:p>
         </p:txBody>
       </p:sp>
@@ -3705,7 +4200,7 @@
             <a:r>
               <a:rPr lang="en-US" sz="2200" b="1" kern="0" spc="100" dirty="0">
                 <a:solidFill>
-                  <a:srgbClr val="FFFFFF"/>
+                  <a:sysClr val="windowText" lastClr="000000"/>
                 </a:solidFill>
                 <a:latin typeface="Calibri" pitchFamily="34" charset="0"/>
                 <a:ea typeface="Calibri" pitchFamily="34" charset="-122"/>
@@ -3713,7 +4208,11 @@
               </a:rPr>
               <a:t>VALIDITY: ADDRESSING THREATS TO EXTERNAL GENERALISABILITY</a:t>
             </a:r>
-            <a:endParaRPr lang="en-US" sz="2200" dirty="0"/>
+            <a:endParaRPr lang="en-US" sz="2200" dirty="0">
+              <a:solidFill>
+                <a:sysClr val="windowText" lastClr="000000"/>
+              </a:solidFill>
+            </a:endParaRPr>
           </a:p>
         </p:txBody>
       </p:sp>
@@ -4296,7 +4795,7 @@
             <a:r>
               <a:rPr lang="en-US" sz="2200" b="1" kern="0" spc="100" dirty="0">
                 <a:solidFill>
-                  <a:srgbClr val="FFFFFF"/>
+                  <a:sysClr val="windowText" lastClr="000000"/>
                 </a:solidFill>
                 <a:latin typeface="Calibri" pitchFamily="34" charset="0"/>
                 <a:ea typeface="Calibri" pitchFamily="34" charset="-122"/>
@@ -4304,7 +4803,11 @@
               </a:rPr>
               <a:t>LIMITATIONS &amp; FUTURE DIRECTIONS</a:t>
             </a:r>
-            <a:endParaRPr lang="en-US" sz="2200" dirty="0"/>
+            <a:endParaRPr lang="en-US" sz="2200" dirty="0">
+              <a:solidFill>
+                <a:sysClr val="windowText" lastClr="000000"/>
+              </a:solidFill>
+            </a:endParaRPr>
           </a:p>
         </p:txBody>
       </p:sp>
@@ -5060,1091 +5563,6 @@
 </file>
 
 <file path=ppt/slides/slide13.xml><?xml version="1.0" encoding="utf-8"?>
-<p:sld xmlns:a="http://schemas.openxmlformats.org/drawingml/2006/main" xmlns:r="http://schemas.openxmlformats.org/officeDocument/2006/relationships" xmlns:p="http://schemas.openxmlformats.org/presentationml/2006/main">
-  <p:cSld name="Slide 13">
-    <p:bg>
-      <p:bgPr>
-        <a:solidFill>
-          <a:srgbClr val="F8FAFC"/>
-        </a:solidFill>
-        <a:effectLst/>
-      </p:bgPr>
-    </p:bg>
-    <p:spTree>
-      <p:nvGrpSpPr>
-        <p:cNvPr id="1" name=""/>
-        <p:cNvGrpSpPr/>
-        <p:nvPr/>
-      </p:nvGrpSpPr>
-      <p:grpSpPr>
-        <a:xfrm>
-          <a:off x="0" y="0"/>
-          <a:ext cx="0" cy="0"/>
-          <a:chOff x="0" y="0"/>
-          <a:chExt cx="0" cy="0"/>
-        </a:xfrm>
-      </p:grpSpPr>
-      <p:sp>
-        <p:nvSpPr>
-          <p:cNvPr id="2" name="Shape 0"/>
-          <p:cNvSpPr/>
-          <p:nvPr/>
-        </p:nvSpPr>
-        <p:spPr>
-          <a:xfrm>
-            <a:off x="0" y="0"/>
-            <a:ext cx="9144000" cy="109728"/>
-          </a:xfrm>
-          <a:prstGeom prst="rect">
-            <a:avLst/>
-          </a:prstGeom>
-          <a:solidFill>
-            <a:srgbClr val="0F2D4E"/>
-          </a:solidFill>
-          <a:ln w="12700">
-            <a:solidFill>
-              <a:srgbClr val="0F2D4E"/>
-            </a:solidFill>
-            <a:prstDash val="solid"/>
-          </a:ln>
-        </p:spPr>
-      </p:sp>
-      <p:sp>
-        <p:nvSpPr>
-          <p:cNvPr id="3" name="Text 1"/>
-          <p:cNvSpPr/>
-          <p:nvPr/>
-        </p:nvSpPr>
-        <p:spPr>
-          <a:xfrm>
-            <a:off x="411480" y="164592"/>
-            <a:ext cx="8321040" cy="475488"/>
-          </a:xfrm>
-          <a:prstGeom prst="rect">
-            <a:avLst/>
-          </a:prstGeom>
-          <a:noFill/>
-          <a:ln/>
-        </p:spPr>
-        <p:txBody>
-          <a:bodyPr wrap="square" lIns="0" tIns="0" rIns="0" bIns="0" rtlCol="0" anchor="ctr"/>
-          <a:lstStyle/>
-          <a:p>
-            <a:pPr marL="0" indent="0">
-              <a:buNone/>
-            </a:pPr>
-            <a:r>
-              <a:rPr lang="en-US" sz="2200" b="1" kern="0" spc="100" dirty="0">
-                <a:solidFill>
-                  <a:srgbClr val="FFFFFF"/>
-                </a:solidFill>
-                <a:latin typeface="Calibri" pitchFamily="34" charset="0"/>
-                <a:ea typeface="Calibri" pitchFamily="34" charset="-122"/>
-                <a:cs typeface="Calibri" pitchFamily="34" charset="-120"/>
-              </a:rPr>
-              <a:t>CRITICAL DISCUSSION: STRENGTHS &amp; OPEN QUESTIONS</a:t>
-            </a:r>
-            <a:endParaRPr lang="en-US" sz="2200" dirty="0"/>
-          </a:p>
-        </p:txBody>
-      </p:sp>
-      <p:sp>
-        <p:nvSpPr>
-          <p:cNvPr id="4" name="Text 2"/>
-          <p:cNvSpPr/>
-          <p:nvPr/>
-        </p:nvSpPr>
-        <p:spPr>
-          <a:xfrm>
-            <a:off x="8503920" y="4800600"/>
-            <a:ext cx="502920" cy="228600"/>
-          </a:xfrm>
-          <a:prstGeom prst="rect">
-            <a:avLst/>
-          </a:prstGeom>
-          <a:noFill/>
-          <a:ln/>
-        </p:spPr>
-        <p:txBody>
-          <a:bodyPr wrap="square" lIns="0" tIns="0" rIns="0" bIns="0" rtlCol="0" anchor="ctr"/>
-          <a:lstStyle/>
-          <a:p>
-            <a:pPr marL="0" indent="0" algn="r">
-              <a:buNone/>
-            </a:pPr>
-            <a:r>
-              <a:rPr lang="en-US" sz="1000" b="1" dirty="0">
-                <a:solidFill>
-                  <a:srgbClr val="94A3B8"/>
-                </a:solidFill>
-              </a:rPr>
-              <a:t>13</a:t>
-            </a:r>
-            <a:endParaRPr lang="en-US" sz="1000" dirty="0"/>
-          </a:p>
-        </p:txBody>
-      </p:sp>
-      <p:sp>
-        <p:nvSpPr>
-          <p:cNvPr id="5" name="Shape 3"/>
-          <p:cNvSpPr/>
-          <p:nvPr/>
-        </p:nvSpPr>
-        <p:spPr>
-          <a:xfrm>
-            <a:off x="320040" y="749808"/>
-            <a:ext cx="4114800" cy="347472"/>
-          </a:xfrm>
-          <a:prstGeom prst="rect">
-            <a:avLst/>
-          </a:prstGeom>
-          <a:solidFill>
-            <a:srgbClr val="0D9488"/>
-          </a:solidFill>
-          <a:ln w="12700">
-            <a:solidFill>
-              <a:srgbClr val="0D9488"/>
-            </a:solidFill>
-            <a:prstDash val="solid"/>
-          </a:ln>
-        </p:spPr>
-      </p:sp>
-      <p:sp>
-        <p:nvSpPr>
-          <p:cNvPr id="6" name="Text 4"/>
-          <p:cNvSpPr/>
-          <p:nvPr/>
-        </p:nvSpPr>
-        <p:spPr>
-          <a:xfrm>
-            <a:off x="411480" y="749808"/>
-            <a:ext cx="3931920" cy="347472"/>
-          </a:xfrm>
-          <a:prstGeom prst="rect">
-            <a:avLst/>
-          </a:prstGeom>
-          <a:noFill/>
-          <a:ln/>
-        </p:spPr>
-        <p:txBody>
-          <a:bodyPr wrap="square" lIns="0" tIns="0" rIns="0" bIns="0" rtlCol="0" anchor="ctr"/>
-          <a:lstStyle/>
-          <a:p>
-            <a:pPr marL="0" indent="0">
-              <a:buNone/>
-            </a:pPr>
-            <a:r>
-              <a:rPr lang="en-US" sz="1200" b="1" dirty="0">
-                <a:solidFill>
-                  <a:srgbClr val="FFFFFF"/>
-                </a:solidFill>
-                <a:latin typeface="Calibri" pitchFamily="34" charset="0"/>
-                <a:ea typeface="Calibri" pitchFamily="34" charset="-122"/>
-                <a:cs typeface="Calibri" pitchFamily="34" charset="-120"/>
-              </a:rPr>
-              <a:t>✓  Strengths</a:t>
-            </a:r>
-            <a:endParaRPr lang="en-US" sz="1200" dirty="0"/>
-          </a:p>
-        </p:txBody>
-      </p:sp>
-      <p:sp>
-        <p:nvSpPr>
-          <p:cNvPr id="7" name="Shape 5"/>
-          <p:cNvSpPr/>
-          <p:nvPr/>
-        </p:nvSpPr>
-        <p:spPr>
-          <a:xfrm>
-            <a:off x="320040" y="1170432"/>
-            <a:ext cx="4114800" cy="804672"/>
-          </a:xfrm>
-          <a:prstGeom prst="rect">
-            <a:avLst/>
-          </a:prstGeom>
-          <a:solidFill>
-            <a:srgbClr val="FFFFFF"/>
-          </a:solidFill>
-          <a:ln w="6350">
-            <a:solidFill>
-              <a:srgbClr val="E2E8F0"/>
-            </a:solidFill>
-            <a:prstDash val="solid"/>
-          </a:ln>
-        </p:spPr>
-      </p:sp>
-      <p:sp>
-        <p:nvSpPr>
-          <p:cNvPr id="8" name="Text 6"/>
-          <p:cNvSpPr/>
-          <p:nvPr/>
-        </p:nvSpPr>
-        <p:spPr>
-          <a:xfrm>
-            <a:off x="457200" y="1225296"/>
-            <a:ext cx="3840480" cy="256032"/>
-          </a:xfrm>
-          <a:prstGeom prst="rect">
-            <a:avLst/>
-          </a:prstGeom>
-          <a:noFill/>
-          <a:ln/>
-        </p:spPr>
-        <p:txBody>
-          <a:bodyPr wrap="square" lIns="0" tIns="0" rIns="0" bIns="0" rtlCol="0" anchor="ctr"/>
-          <a:lstStyle/>
-          <a:p>
-            <a:pPr marL="0" indent="0">
-              <a:buNone/>
-            </a:pPr>
-            <a:r>
-              <a:rPr lang="en-US" sz="1100" b="1" dirty="0">
-                <a:solidFill>
-                  <a:srgbClr val="0F2D4E"/>
-                </a:solidFill>
-                <a:latin typeface="Calibri" pitchFamily="34" charset="0"/>
-                <a:ea typeface="Calibri" pitchFamily="34" charset="-122"/>
-                <a:cs typeface="Calibri" pitchFamily="34" charset="-120"/>
-              </a:rPr>
-              <a:t>Scale &amp; Reach</a:t>
-            </a:r>
-            <a:endParaRPr lang="en-US" sz="1100" dirty="0"/>
-          </a:p>
-        </p:txBody>
-      </p:sp>
-      <p:sp>
-        <p:nvSpPr>
-          <p:cNvPr id="9" name="Text 7"/>
-          <p:cNvSpPr/>
-          <p:nvPr/>
-        </p:nvSpPr>
-        <p:spPr>
-          <a:xfrm>
-            <a:off x="457200" y="1499616"/>
-            <a:ext cx="3840480" cy="438912"/>
-          </a:xfrm>
-          <a:prstGeom prst="rect">
-            <a:avLst/>
-          </a:prstGeom>
-          <a:noFill/>
-          <a:ln/>
-        </p:spPr>
-        <p:txBody>
-          <a:bodyPr wrap="square" lIns="0" tIns="0" rIns="0" bIns="0" rtlCol="0" anchor="t"/>
-          <a:lstStyle/>
-          <a:p>
-            <a:pPr marL="0" indent="0">
-              <a:buNone/>
-            </a:pPr>
-            <a:r>
-              <a:rPr lang="en-US" sz="1000" dirty="0">
-                <a:solidFill>
-                  <a:srgbClr val="475569"/>
-                </a:solidFill>
-                <a:latin typeface="Calibri" pitchFamily="34" charset="0"/>
-                <a:ea typeface="Calibri" pitchFamily="34" charset="-122"/>
-                <a:cs typeface="Calibri" pitchFamily="34" charset="-120"/>
-              </a:rPr>
-              <a:t>2,042 participants across 8 nations gives unusually high external validity for an educational intervention study.</a:t>
-            </a:r>
-            <a:endParaRPr lang="en-US" sz="1000" dirty="0"/>
-          </a:p>
-        </p:txBody>
-      </p:sp>
-      <p:sp>
-        <p:nvSpPr>
-          <p:cNvPr id="10" name="Shape 8"/>
-          <p:cNvSpPr/>
-          <p:nvPr/>
-        </p:nvSpPr>
-        <p:spPr>
-          <a:xfrm>
-            <a:off x="320040" y="2084832"/>
-            <a:ext cx="4114800" cy="804672"/>
-          </a:xfrm>
-          <a:prstGeom prst="rect">
-            <a:avLst/>
-          </a:prstGeom>
-          <a:solidFill>
-            <a:srgbClr val="FFFFFF"/>
-          </a:solidFill>
-          <a:ln w="6350">
-            <a:solidFill>
-              <a:srgbClr val="E2E8F0"/>
-            </a:solidFill>
-            <a:prstDash val="solid"/>
-          </a:ln>
-        </p:spPr>
-      </p:sp>
-      <p:sp>
-        <p:nvSpPr>
-          <p:cNvPr id="11" name="Text 9"/>
-          <p:cNvSpPr/>
-          <p:nvPr/>
-        </p:nvSpPr>
-        <p:spPr>
-          <a:xfrm>
-            <a:off x="457200" y="2139696"/>
-            <a:ext cx="3840480" cy="256032"/>
-          </a:xfrm>
-          <a:prstGeom prst="rect">
-            <a:avLst/>
-          </a:prstGeom>
-          <a:noFill/>
-          <a:ln/>
-        </p:spPr>
-        <p:txBody>
-          <a:bodyPr wrap="square" lIns="0" tIns="0" rIns="0" bIns="0" rtlCol="0" anchor="ctr"/>
-          <a:lstStyle/>
-          <a:p>
-            <a:pPr marL="0" indent="0">
-              <a:buNone/>
-            </a:pPr>
-            <a:r>
-              <a:rPr lang="en-US" sz="1100" b="1" dirty="0">
-                <a:solidFill>
-                  <a:srgbClr val="0F2D4E"/>
-                </a:solidFill>
-                <a:latin typeface="Calibri" pitchFamily="34" charset="0"/>
-                <a:ea typeface="Calibri" pitchFamily="34" charset="-122"/>
-                <a:cs typeface="Calibri" pitchFamily="34" charset="-120"/>
-              </a:rPr>
-              <a:t>Cross-political robustness</a:t>
-            </a:r>
-            <a:endParaRPr lang="en-US" sz="1100" dirty="0"/>
-          </a:p>
-        </p:txBody>
-      </p:sp>
-      <p:sp>
-        <p:nvSpPr>
-          <p:cNvPr id="12" name="Text 10"/>
-          <p:cNvSpPr/>
-          <p:nvPr/>
-        </p:nvSpPr>
-        <p:spPr>
-          <a:xfrm>
-            <a:off x="457200" y="2414016"/>
-            <a:ext cx="3840480" cy="438912"/>
-          </a:xfrm>
-          <a:prstGeom prst="rect">
-            <a:avLst/>
-          </a:prstGeom>
-          <a:noFill/>
-          <a:ln/>
-        </p:spPr>
-        <p:txBody>
-          <a:bodyPr wrap="square" lIns="0" tIns="0" rIns="0" bIns="0" rtlCol="0" anchor="t"/>
-          <a:lstStyle/>
-          <a:p>
-            <a:pPr marL="0" indent="0">
-              <a:buNone/>
-            </a:pPr>
-            <a:r>
-              <a:rPr lang="en-US" sz="1000" dirty="0">
-                <a:solidFill>
-                  <a:srgbClr val="475569"/>
-                </a:solidFill>
-                <a:latin typeface="Calibri" pitchFamily="34" charset="0"/>
-                <a:ea typeface="Calibri" pitchFamily="34" charset="-122"/>
-                <a:cs typeface="Calibri" pitchFamily="34" charset="-120"/>
-              </a:rPr>
-              <a:t>Finding that climate skeptics gain equally is politically important and rarely demonstrated in education research.</a:t>
-            </a:r>
-            <a:endParaRPr lang="en-US" sz="1000" dirty="0"/>
-          </a:p>
-        </p:txBody>
-      </p:sp>
-      <p:sp>
-        <p:nvSpPr>
-          <p:cNvPr id="13" name="Shape 11"/>
-          <p:cNvSpPr/>
-          <p:nvPr/>
-        </p:nvSpPr>
-        <p:spPr>
-          <a:xfrm>
-            <a:off x="320040" y="2999232"/>
-            <a:ext cx="4114800" cy="804672"/>
-          </a:xfrm>
-          <a:prstGeom prst="rect">
-            <a:avLst/>
-          </a:prstGeom>
-          <a:solidFill>
-            <a:srgbClr val="FFFFFF"/>
-          </a:solidFill>
-          <a:ln w="6350">
-            <a:solidFill>
-              <a:srgbClr val="E2E8F0"/>
-            </a:solidFill>
-            <a:prstDash val="solid"/>
-          </a:ln>
-        </p:spPr>
-      </p:sp>
-      <p:sp>
-        <p:nvSpPr>
-          <p:cNvPr id="14" name="Text 12"/>
-          <p:cNvSpPr/>
-          <p:nvPr/>
-        </p:nvSpPr>
-        <p:spPr>
-          <a:xfrm>
-            <a:off x="457200" y="3054096"/>
-            <a:ext cx="3840480" cy="256032"/>
-          </a:xfrm>
-          <a:prstGeom prst="rect">
-            <a:avLst/>
-          </a:prstGeom>
-          <a:noFill/>
-          <a:ln/>
-        </p:spPr>
-        <p:txBody>
-          <a:bodyPr wrap="square" lIns="0" tIns="0" rIns="0" bIns="0" rtlCol="0" anchor="ctr"/>
-          <a:lstStyle/>
-          <a:p>
-            <a:pPr marL="0" indent="0">
-              <a:buNone/>
-            </a:pPr>
-            <a:r>
-              <a:rPr lang="en-US" sz="1100" b="1" dirty="0">
-                <a:solidFill>
-                  <a:srgbClr val="0F2D4E"/>
-                </a:solidFill>
-                <a:latin typeface="Calibri" pitchFamily="34" charset="0"/>
-                <a:ea typeface="Calibri" pitchFamily="34" charset="-122"/>
-                <a:cs typeface="Calibri" pitchFamily="34" charset="-120"/>
-              </a:rPr>
-              <a:t>Mechanism clarity</a:t>
-            </a:r>
-            <a:endParaRPr lang="en-US" sz="1100" dirty="0"/>
-          </a:p>
-        </p:txBody>
-      </p:sp>
-      <p:sp>
-        <p:nvSpPr>
-          <p:cNvPr id="15" name="Text 13"/>
-          <p:cNvSpPr/>
-          <p:nvPr/>
-        </p:nvSpPr>
-        <p:spPr>
-          <a:xfrm>
-            <a:off x="457200" y="3328416"/>
-            <a:ext cx="3840480" cy="438912"/>
-          </a:xfrm>
-          <a:prstGeom prst="rect">
-            <a:avLst/>
-          </a:prstGeom>
-          <a:noFill/>
-          <a:ln/>
-        </p:spPr>
-        <p:txBody>
-          <a:bodyPr wrap="square" lIns="0" tIns="0" rIns="0" bIns="0" rtlCol="0" anchor="t"/>
-          <a:lstStyle/>
-          <a:p>
-            <a:pPr marL="0" indent="0">
-              <a:buNone/>
-            </a:pPr>
-            <a:r>
-              <a:rPr lang="en-US" sz="1000" dirty="0">
-                <a:solidFill>
-                  <a:srgbClr val="475569"/>
-                </a:solidFill>
-                <a:latin typeface="Calibri" pitchFamily="34" charset="0"/>
-                <a:ea typeface="Calibri" pitchFamily="34" charset="-122"/>
-                <a:cs typeface="Calibri" pitchFamily="34" charset="-120"/>
-              </a:rPr>
-              <a:t>Distinguishing affect from knowledge as the driver of intent is a theoretically grounded contribution, not just 'it worked'.</a:t>
-            </a:r>
-            <a:endParaRPr lang="en-US" sz="1000" dirty="0"/>
-          </a:p>
-        </p:txBody>
-      </p:sp>
-      <p:sp>
-        <p:nvSpPr>
-          <p:cNvPr id="16" name="Shape 14"/>
-          <p:cNvSpPr/>
-          <p:nvPr/>
-        </p:nvSpPr>
-        <p:spPr>
-          <a:xfrm>
-            <a:off x="320040" y="3913632"/>
-            <a:ext cx="4114800" cy="804672"/>
-          </a:xfrm>
-          <a:prstGeom prst="rect">
-            <a:avLst/>
-          </a:prstGeom>
-          <a:solidFill>
-            <a:srgbClr val="FFFFFF"/>
-          </a:solidFill>
-          <a:ln w="6350">
-            <a:solidFill>
-              <a:srgbClr val="E2E8F0"/>
-            </a:solidFill>
-            <a:prstDash val="solid"/>
-          </a:ln>
-        </p:spPr>
-      </p:sp>
-      <p:sp>
-        <p:nvSpPr>
-          <p:cNvPr id="17" name="Text 15"/>
-          <p:cNvSpPr/>
-          <p:nvPr/>
-        </p:nvSpPr>
-        <p:spPr>
-          <a:xfrm>
-            <a:off x="457200" y="3968496"/>
-            <a:ext cx="3840480" cy="256032"/>
-          </a:xfrm>
-          <a:prstGeom prst="rect">
-            <a:avLst/>
-          </a:prstGeom>
-          <a:noFill/>
-          <a:ln/>
-        </p:spPr>
-        <p:txBody>
-          <a:bodyPr wrap="square" lIns="0" tIns="0" rIns="0" bIns="0" rtlCol="0" anchor="ctr"/>
-          <a:lstStyle/>
-          <a:p>
-            <a:pPr marL="0" indent="0">
-              <a:buNone/>
-            </a:pPr>
-            <a:r>
-              <a:rPr lang="en-US" sz="1100" b="1" dirty="0">
-                <a:solidFill>
-                  <a:srgbClr val="0F2D4E"/>
-                </a:solidFill>
-                <a:latin typeface="Calibri" pitchFamily="34" charset="0"/>
-                <a:ea typeface="Calibri" pitchFamily="34" charset="-122"/>
-                <a:cs typeface="Calibri" pitchFamily="34" charset="-120"/>
-              </a:rPr>
-              <a:t>Open access</a:t>
-            </a:r>
-            <a:endParaRPr lang="en-US" sz="1100" dirty="0"/>
-          </a:p>
-        </p:txBody>
-      </p:sp>
-      <p:sp>
-        <p:nvSpPr>
-          <p:cNvPr id="18" name="Text 16"/>
-          <p:cNvSpPr/>
-          <p:nvPr/>
-        </p:nvSpPr>
-        <p:spPr>
-          <a:xfrm>
-            <a:off x="457200" y="4242816"/>
-            <a:ext cx="3840480" cy="438912"/>
-          </a:xfrm>
-          <a:prstGeom prst="rect">
-            <a:avLst/>
-          </a:prstGeom>
-          <a:noFill/>
-          <a:ln/>
-        </p:spPr>
-        <p:txBody>
-          <a:bodyPr wrap="square" lIns="0" tIns="0" rIns="0" bIns="0" rtlCol="0" anchor="t"/>
-          <a:lstStyle/>
-          <a:p>
-            <a:pPr marL="0" indent="0">
-              <a:buNone/>
-            </a:pPr>
-            <a:r>
-              <a:rPr lang="en-US" sz="1000" dirty="0">
-                <a:solidFill>
-                  <a:srgbClr val="475569"/>
-                </a:solidFill>
-                <a:latin typeface="Calibri" pitchFamily="34" charset="0"/>
-                <a:ea typeface="Calibri" pitchFamily="34" charset="-122"/>
-                <a:cs typeface="Calibri" pitchFamily="34" charset="-120"/>
-              </a:rPr>
-              <a:t>Data available on Dryad; simulation freely available — high reproducibility and replication potential.</a:t>
-            </a:r>
-            <a:endParaRPr lang="en-US" sz="1000" dirty="0"/>
-          </a:p>
-        </p:txBody>
-      </p:sp>
-      <p:sp>
-        <p:nvSpPr>
-          <p:cNvPr id="19" name="Shape 17"/>
-          <p:cNvSpPr/>
-          <p:nvPr/>
-        </p:nvSpPr>
-        <p:spPr>
-          <a:xfrm>
-            <a:off x="4663440" y="749808"/>
-            <a:ext cx="4160520" cy="347472"/>
-          </a:xfrm>
-          <a:prstGeom prst="rect">
-            <a:avLst/>
-          </a:prstGeom>
-          <a:solidFill>
-            <a:srgbClr val="F59E0B"/>
-          </a:solidFill>
-          <a:ln w="12700">
-            <a:solidFill>
-              <a:srgbClr val="F59E0B"/>
-            </a:solidFill>
-            <a:prstDash val="solid"/>
-          </a:ln>
-        </p:spPr>
-      </p:sp>
-      <p:sp>
-        <p:nvSpPr>
-          <p:cNvPr id="20" name="Text 18"/>
-          <p:cNvSpPr/>
-          <p:nvPr/>
-        </p:nvSpPr>
-        <p:spPr>
-          <a:xfrm>
-            <a:off x="4773168" y="749808"/>
-            <a:ext cx="3931920" cy="347472"/>
-          </a:xfrm>
-          <a:prstGeom prst="rect">
-            <a:avLst/>
-          </a:prstGeom>
-          <a:noFill/>
-          <a:ln/>
-        </p:spPr>
-        <p:txBody>
-          <a:bodyPr wrap="square" lIns="0" tIns="0" rIns="0" bIns="0" rtlCol="0" anchor="ctr"/>
-          <a:lstStyle/>
-          <a:p>
-            <a:pPr marL="0" indent="0">
-              <a:buNone/>
-            </a:pPr>
-            <a:r>
-              <a:rPr lang="en-US" sz="1200" b="1" dirty="0">
-                <a:solidFill>
-                  <a:srgbClr val="FFFFFF"/>
-                </a:solidFill>
-                <a:latin typeface="Calibri" pitchFamily="34" charset="0"/>
-                <a:ea typeface="Calibri" pitchFamily="34" charset="-122"/>
-                <a:cs typeface="Calibri" pitchFamily="34" charset="-120"/>
-              </a:rPr>
-              <a:t>?  Open Questions</a:t>
-            </a:r>
-            <a:endParaRPr lang="en-US" sz="1200" dirty="0"/>
-          </a:p>
-        </p:txBody>
-      </p:sp>
-      <p:sp>
-        <p:nvSpPr>
-          <p:cNvPr id="21" name="Shape 19"/>
-          <p:cNvSpPr/>
-          <p:nvPr/>
-        </p:nvSpPr>
-        <p:spPr>
-          <a:xfrm>
-            <a:off x="4663440" y="1170432"/>
-            <a:ext cx="4160520" cy="804672"/>
-          </a:xfrm>
-          <a:prstGeom prst="rect">
-            <a:avLst/>
-          </a:prstGeom>
-          <a:solidFill>
-            <a:srgbClr val="FFFFFF"/>
-          </a:solidFill>
-          <a:ln w="6350">
-            <a:solidFill>
-              <a:srgbClr val="E2E8F0"/>
-            </a:solidFill>
-            <a:prstDash val="solid"/>
-          </a:ln>
-        </p:spPr>
-      </p:sp>
-      <p:sp>
-        <p:nvSpPr>
-          <p:cNvPr id="22" name="Text 20"/>
-          <p:cNvSpPr/>
-          <p:nvPr/>
-        </p:nvSpPr>
-        <p:spPr>
-          <a:xfrm>
-            <a:off x="4800600" y="1225296"/>
-            <a:ext cx="3840480" cy="256032"/>
-          </a:xfrm>
-          <a:prstGeom prst="rect">
-            <a:avLst/>
-          </a:prstGeom>
-          <a:noFill/>
-          <a:ln/>
-        </p:spPr>
-        <p:txBody>
-          <a:bodyPr wrap="square" lIns="0" tIns="0" rIns="0" bIns="0" rtlCol="0" anchor="ctr"/>
-          <a:lstStyle/>
-          <a:p>
-            <a:pPr marL="0" indent="0">
-              <a:buNone/>
-            </a:pPr>
-            <a:r>
-              <a:rPr lang="en-US" sz="1100" b="1" dirty="0">
-                <a:solidFill>
-                  <a:srgbClr val="0F2D4E"/>
-                </a:solidFill>
-                <a:latin typeface="Calibri" pitchFamily="34" charset="0"/>
-                <a:ea typeface="Calibri" pitchFamily="34" charset="-122"/>
-                <a:cs typeface="Calibri" pitchFamily="34" charset="-120"/>
-              </a:rPr>
-              <a:t>Real action vs. intent</a:t>
-            </a:r>
-            <a:endParaRPr lang="en-US" sz="1100" dirty="0"/>
-          </a:p>
-        </p:txBody>
-      </p:sp>
-      <p:sp>
-        <p:nvSpPr>
-          <p:cNvPr id="23" name="Text 21"/>
-          <p:cNvSpPr/>
-          <p:nvPr/>
-        </p:nvSpPr>
-        <p:spPr>
-          <a:xfrm>
-            <a:off x="4800600" y="1499616"/>
-            <a:ext cx="3840480" cy="438912"/>
-          </a:xfrm>
-          <a:prstGeom prst="rect">
-            <a:avLst/>
-          </a:prstGeom>
-          <a:noFill/>
-          <a:ln/>
-        </p:spPr>
-        <p:txBody>
-          <a:bodyPr wrap="square" lIns="0" tIns="0" rIns="0" bIns="0" rtlCol="0" anchor="t"/>
-          <a:lstStyle/>
-          <a:p>
-            <a:pPr marL="0" indent="0">
-              <a:buNone/>
-            </a:pPr>
-            <a:r>
-              <a:rPr lang="en-US" sz="1000" dirty="0">
-                <a:solidFill>
-                  <a:srgbClr val="475569"/>
-                </a:solidFill>
-                <a:latin typeface="Calibri" pitchFamily="34" charset="0"/>
-                <a:ea typeface="Calibri" pitchFamily="34" charset="-122"/>
-                <a:cs typeface="Calibri" pitchFamily="34" charset="-120"/>
-              </a:rPr>
-              <a:t>Does intent to act measured immediately post-simulation translate into actual behaviour weeks or months later?</a:t>
-            </a:r>
-            <a:endParaRPr lang="en-US" sz="1000" dirty="0"/>
-          </a:p>
-        </p:txBody>
-      </p:sp>
-      <p:sp>
-        <p:nvSpPr>
-          <p:cNvPr id="24" name="Shape 22"/>
-          <p:cNvSpPr/>
-          <p:nvPr/>
-        </p:nvSpPr>
-        <p:spPr>
-          <a:xfrm>
-            <a:off x="4663440" y="2084832"/>
-            <a:ext cx="4160520" cy="804672"/>
-          </a:xfrm>
-          <a:prstGeom prst="rect">
-            <a:avLst/>
-          </a:prstGeom>
-          <a:solidFill>
-            <a:srgbClr val="FFFFFF"/>
-          </a:solidFill>
-          <a:ln w="6350">
-            <a:solidFill>
-              <a:srgbClr val="E2E8F0"/>
-            </a:solidFill>
-            <a:prstDash val="solid"/>
-          </a:ln>
-        </p:spPr>
-      </p:sp>
-      <p:sp>
-        <p:nvSpPr>
-          <p:cNvPr id="25" name="Text 23"/>
-          <p:cNvSpPr/>
-          <p:nvPr/>
-        </p:nvSpPr>
-        <p:spPr>
-          <a:xfrm>
-            <a:off x="4800600" y="2139696"/>
-            <a:ext cx="3840480" cy="256032"/>
-          </a:xfrm>
-          <a:prstGeom prst="rect">
-            <a:avLst/>
-          </a:prstGeom>
-          <a:noFill/>
-          <a:ln/>
-        </p:spPr>
-        <p:txBody>
-          <a:bodyPr wrap="square" lIns="0" tIns="0" rIns="0" bIns="0" rtlCol="0" anchor="ctr"/>
-          <a:lstStyle/>
-          <a:p>
-            <a:pPr marL="0" indent="0">
-              <a:buNone/>
-            </a:pPr>
-            <a:r>
-              <a:rPr lang="en-US" sz="1100" b="1" dirty="0">
-                <a:solidFill>
-                  <a:srgbClr val="0F2D4E"/>
-                </a:solidFill>
-                <a:latin typeface="Calibri" pitchFamily="34" charset="0"/>
-                <a:ea typeface="Calibri" pitchFamily="34" charset="-122"/>
-                <a:cs typeface="Calibri" pitchFamily="34" charset="-120"/>
-              </a:rPr>
-              <a:t>Facilitator dependency</a:t>
-            </a:r>
-            <a:endParaRPr lang="en-US" sz="1100" dirty="0"/>
-          </a:p>
-        </p:txBody>
-      </p:sp>
-      <p:sp>
-        <p:nvSpPr>
-          <p:cNvPr id="26" name="Text 24"/>
-          <p:cNvSpPr/>
-          <p:nvPr/>
-        </p:nvSpPr>
-        <p:spPr>
-          <a:xfrm>
-            <a:off x="4800600" y="2414016"/>
-            <a:ext cx="3840480" cy="438912"/>
-          </a:xfrm>
-          <a:prstGeom prst="rect">
-            <a:avLst/>
-          </a:prstGeom>
-          <a:noFill/>
-          <a:ln/>
-        </p:spPr>
-        <p:txBody>
-          <a:bodyPr wrap="square" lIns="0" tIns="0" rIns="0" bIns="0" rtlCol="0" anchor="t"/>
-          <a:lstStyle/>
-          <a:p>
-            <a:pPr marL="0" indent="0">
-              <a:buNone/>
-            </a:pPr>
-            <a:r>
-              <a:rPr lang="en-US" sz="1000" dirty="0">
-                <a:solidFill>
-                  <a:srgbClr val="475569"/>
-                </a:solidFill>
-                <a:latin typeface="Calibri" pitchFamily="34" charset="0"/>
-                <a:ea typeface="Calibri" pitchFamily="34" charset="-122"/>
-                <a:cs typeface="Calibri" pitchFamily="34" charset="-120"/>
-              </a:rPr>
-              <a:t>How much of the effect is World Climate vs. a skilled facilitator? Can low-resource settings replicate gains?</a:t>
-            </a:r>
-            <a:endParaRPr lang="en-US" sz="1000" dirty="0"/>
-          </a:p>
-        </p:txBody>
-      </p:sp>
-      <p:sp>
-        <p:nvSpPr>
-          <p:cNvPr id="27" name="Shape 25"/>
-          <p:cNvSpPr/>
-          <p:nvPr/>
-        </p:nvSpPr>
-        <p:spPr>
-          <a:xfrm>
-            <a:off x="4663440" y="2999232"/>
-            <a:ext cx="4160520" cy="804672"/>
-          </a:xfrm>
-          <a:prstGeom prst="rect">
-            <a:avLst/>
-          </a:prstGeom>
-          <a:solidFill>
-            <a:srgbClr val="FFFFFF"/>
-          </a:solidFill>
-          <a:ln w="6350">
-            <a:solidFill>
-              <a:srgbClr val="E2E8F0"/>
-            </a:solidFill>
-            <a:prstDash val="solid"/>
-          </a:ln>
-        </p:spPr>
-      </p:sp>
-      <p:sp>
-        <p:nvSpPr>
-          <p:cNvPr id="28" name="Text 26"/>
-          <p:cNvSpPr/>
-          <p:nvPr/>
-        </p:nvSpPr>
-        <p:spPr>
-          <a:xfrm>
-            <a:off x="4800600" y="3054096"/>
-            <a:ext cx="3840480" cy="256032"/>
-          </a:xfrm>
-          <a:prstGeom prst="rect">
-            <a:avLst/>
-          </a:prstGeom>
-          <a:noFill/>
-          <a:ln/>
-        </p:spPr>
-        <p:txBody>
-          <a:bodyPr wrap="square" lIns="0" tIns="0" rIns="0" bIns="0" rtlCol="0" anchor="ctr"/>
-          <a:lstStyle/>
-          <a:p>
-            <a:pPr marL="0" indent="0">
-              <a:buNone/>
-            </a:pPr>
-            <a:r>
-              <a:rPr lang="en-US" sz="1100" b="1" dirty="0">
-                <a:solidFill>
-                  <a:srgbClr val="0F2D4E"/>
-                </a:solidFill>
-                <a:latin typeface="Calibri" pitchFamily="34" charset="0"/>
-                <a:ea typeface="Calibri" pitchFamily="34" charset="-122"/>
-                <a:cs typeface="Calibri" pitchFamily="34" charset="-120"/>
-              </a:rPr>
-              <a:t>Construct validity</a:t>
-            </a:r>
-            <a:endParaRPr lang="en-US" sz="1100" dirty="0"/>
-          </a:p>
-        </p:txBody>
-      </p:sp>
-      <p:sp>
-        <p:nvSpPr>
-          <p:cNvPr id="29" name="Text 27"/>
-          <p:cNvSpPr/>
-          <p:nvPr/>
-        </p:nvSpPr>
-        <p:spPr>
-          <a:xfrm>
-            <a:off x="4800600" y="3328416"/>
-            <a:ext cx="3840480" cy="438912"/>
-          </a:xfrm>
-          <a:prstGeom prst="rect">
-            <a:avLst/>
-          </a:prstGeom>
-          <a:noFill/>
-          <a:ln/>
-        </p:spPr>
-        <p:txBody>
-          <a:bodyPr wrap="square" lIns="0" tIns="0" rIns="0" bIns="0" rtlCol="0" anchor="t"/>
-          <a:lstStyle/>
-          <a:p>
-            <a:pPr marL="0" indent="0">
-              <a:buNone/>
-            </a:pPr>
-            <a:r>
-              <a:rPr lang="en-US" sz="1000" dirty="0">
-                <a:solidFill>
-                  <a:srgbClr val="475569"/>
-                </a:solidFill>
-                <a:latin typeface="Calibri" pitchFamily="34" charset="0"/>
-                <a:ea typeface="Calibri" pitchFamily="34" charset="-122"/>
-                <a:cs typeface="Calibri" pitchFamily="34" charset="-120"/>
-              </a:rPr>
-              <a:t>EFA-derived constructs reflect researcher choices. Would alternative factor structures produce different conclusions?</a:t>
-            </a:r>
-            <a:endParaRPr lang="en-US" sz="1000" dirty="0"/>
-          </a:p>
-        </p:txBody>
-      </p:sp>
-      <p:sp>
-        <p:nvSpPr>
-          <p:cNvPr id="30" name="Shape 28"/>
-          <p:cNvSpPr/>
-          <p:nvPr/>
-        </p:nvSpPr>
-        <p:spPr>
-          <a:xfrm>
-            <a:off x="4663440" y="3913632"/>
-            <a:ext cx="4160520" cy="804672"/>
-          </a:xfrm>
-          <a:prstGeom prst="rect">
-            <a:avLst/>
-          </a:prstGeom>
-          <a:solidFill>
-            <a:srgbClr val="FFFFFF"/>
-          </a:solidFill>
-          <a:ln w="6350">
-            <a:solidFill>
-              <a:srgbClr val="E2E8F0"/>
-            </a:solidFill>
-            <a:prstDash val="solid"/>
-          </a:ln>
-        </p:spPr>
-      </p:sp>
-      <p:sp>
-        <p:nvSpPr>
-          <p:cNvPr id="31" name="Text 29"/>
-          <p:cNvSpPr/>
-          <p:nvPr/>
-        </p:nvSpPr>
-        <p:spPr>
-          <a:xfrm>
-            <a:off x="4800600" y="3968496"/>
-            <a:ext cx="3840480" cy="256032"/>
-          </a:xfrm>
-          <a:prstGeom prst="rect">
-            <a:avLst/>
-          </a:prstGeom>
-          <a:noFill/>
-          <a:ln/>
-        </p:spPr>
-        <p:txBody>
-          <a:bodyPr wrap="square" lIns="0" tIns="0" rIns="0" bIns="0" rtlCol="0" anchor="ctr"/>
-          <a:lstStyle/>
-          <a:p>
-            <a:pPr marL="0" indent="0">
-              <a:buNone/>
-            </a:pPr>
-            <a:r>
-              <a:rPr lang="en-US" sz="1100" b="1" dirty="0">
-                <a:solidFill>
-                  <a:srgbClr val="0F2D4E"/>
-                </a:solidFill>
-                <a:latin typeface="Calibri" pitchFamily="34" charset="0"/>
-                <a:ea typeface="Calibri" pitchFamily="34" charset="-122"/>
-                <a:cs typeface="Calibri" pitchFamily="34" charset="-120"/>
-              </a:rPr>
-              <a:t>Long-term affect decay</a:t>
-            </a:r>
-            <a:endParaRPr lang="en-US" sz="1100" dirty="0"/>
-          </a:p>
-        </p:txBody>
-      </p:sp>
-      <p:sp>
-        <p:nvSpPr>
-          <p:cNvPr id="32" name="Text 30"/>
-          <p:cNvSpPr/>
-          <p:nvPr/>
-        </p:nvSpPr>
-        <p:spPr>
-          <a:xfrm>
-            <a:off x="4800600" y="4242816"/>
-            <a:ext cx="3840480" cy="438912"/>
-          </a:xfrm>
-          <a:prstGeom prst="rect">
-            <a:avLst/>
-          </a:prstGeom>
-          <a:noFill/>
-          <a:ln/>
-        </p:spPr>
-        <p:txBody>
-          <a:bodyPr wrap="square" lIns="0" tIns="0" rIns="0" bIns="0" rtlCol="0" anchor="t"/>
-          <a:lstStyle/>
-          <a:p>
-            <a:pPr marL="0" indent="0">
-              <a:buNone/>
-            </a:pPr>
-            <a:r>
-              <a:rPr lang="en-US" sz="1000" dirty="0">
-                <a:solidFill>
-                  <a:srgbClr val="475569"/>
-                </a:solidFill>
-                <a:latin typeface="Calibri" pitchFamily="34" charset="0"/>
-                <a:ea typeface="Calibri" pitchFamily="34" charset="-122"/>
-                <a:cs typeface="Calibri" pitchFamily="34" charset="-120"/>
-              </a:rPr>
-              <a:t>Urgency and hope may fade without sustained reinforcement. Is a one-shot simulation enough?</a:t>
-            </a:r>
-            <a:endParaRPr lang="en-US" sz="1000" dirty="0"/>
-          </a:p>
-        </p:txBody>
-      </p:sp>
-    </p:spTree>
-  </p:cSld>
-  <p:clrMapOvr>
-    <a:masterClrMapping/>
-  </p:clrMapOvr>
-</p:sld>
-</file>
-
-<file path=ppt/slides/slide14.xml><?xml version="1.0" encoding="utf-8"?>
 <p:sld xmlns:a="http://schemas.openxmlformats.org/drawingml/2006/main" xmlns:r="http://schemas.openxmlformats.org/officeDocument/2006/relationships" xmlns:p="http://schemas.openxmlformats.org/presentationml/2006/main">
   <p:cSld name="Slide 14">
     <p:bg>
@@ -6221,7 +5639,7 @@
             <a:r>
               <a:rPr lang="en-US" sz="2200" b="1" kern="0" spc="100" dirty="0">
                 <a:solidFill>
-                  <a:srgbClr val="FFFFFF"/>
+                  <a:sysClr val="windowText" lastClr="000000"/>
                 </a:solidFill>
                 <a:latin typeface="Calibri" pitchFamily="34" charset="0"/>
                 <a:ea typeface="Calibri" pitchFamily="34" charset="-122"/>
@@ -6229,7 +5647,11 @@
               </a:rPr>
               <a:t>REFERENCES</a:t>
             </a:r>
-            <a:endParaRPr lang="en-US" sz="2200" dirty="0"/>
+            <a:endParaRPr lang="en-US" sz="2200" dirty="0">
+              <a:solidFill>
+                <a:sysClr val="windowText" lastClr="000000"/>
+              </a:solidFill>
+            </a:endParaRPr>
           </a:p>
         </p:txBody>
       </p:sp>
@@ -6263,7 +5685,7 @@
                   <a:srgbClr val="94A3B8"/>
                 </a:solidFill>
               </a:rPr>
-              <a:t>14</a:t>
+              <a:t>13</a:t>
             </a:r>
             <a:endParaRPr lang="en-US" sz="1000" dirty="0"/>
           </a:p>
@@ -6432,45 +5854,6 @@
       </p:sp>
       <p:sp>
         <p:nvSpPr>
-          <p:cNvPr id="10" name="Text 8"/>
-          <p:cNvSpPr/>
-          <p:nvPr/>
-        </p:nvSpPr>
-        <p:spPr>
-          <a:xfrm>
-            <a:off x="658368" y="1280160"/>
-            <a:ext cx="8229600" cy="475488"/>
-          </a:xfrm>
-          <a:prstGeom prst="rect">
-            <a:avLst/>
-          </a:prstGeom>
-          <a:noFill/>
-          <a:ln/>
-        </p:spPr>
-        <p:txBody>
-          <a:bodyPr wrap="square" lIns="0" tIns="0" rIns="0" bIns="0" rtlCol="0" anchor="t"/>
-          <a:lstStyle/>
-          <a:p>
-            <a:pPr marL="0" indent="0">
-              <a:buNone/>
-            </a:pPr>
-            <a:r>
-              <a:rPr lang="en-US" sz="900" dirty="0">
-                <a:solidFill>
-                  <a:srgbClr val="475569"/>
-                </a:solidFill>
-                <a:latin typeface="Calibri" pitchFamily="34" charset="0"/>
-                <a:ea typeface="Calibri" pitchFamily="34" charset="-122"/>
-                <a:cs typeface="Calibri" pitchFamily="34" charset="-120"/>
-              </a:rPr>
-              <a:t>Sterman, J. D., Franck, T., Jones, A., Siegel, L., &amp; Rooney-Varga, J. N. (2015). World Climate: A role-play simulation of climate negotiations. Simulation &amp; Gaming, 46(3–4), 348–382.</a:t>
-            </a:r>
-            <a:endParaRPr lang="en-US" sz="900" dirty="0"/>
-          </a:p>
-        </p:txBody>
-      </p:sp>
-      <p:sp>
-        <p:nvSpPr>
           <p:cNvPr id="11" name="Shape 9"/>
           <p:cNvSpPr/>
           <p:nvPr/>
@@ -6538,7 +5921,7 @@
         </p:nvSpPr>
         <p:spPr>
           <a:xfrm>
-            <a:off x="658368" y="1819656"/>
+            <a:off x="658368" y="1341062"/>
             <a:ext cx="8229600" cy="475488"/>
           </a:xfrm>
           <a:prstGeom prst="rect">
@@ -6638,7 +6021,7 @@
         </p:nvSpPr>
         <p:spPr>
           <a:xfrm>
-            <a:off x="658368" y="2359152"/>
+            <a:off x="658368" y="1886252"/>
             <a:ext cx="8229600" cy="475488"/>
           </a:xfrm>
           <a:prstGeom prst="rect">
@@ -6671,7 +6054,7 @@
       </p:sp>
       <p:sp>
         <p:nvSpPr>
-          <p:cNvPr id="17" name="Shape 15"/>
+          <p:cNvPr id="18" name="Text 16"/>
           <p:cNvSpPr/>
           <p:nvPr/>
         </p:nvSpPr>
@@ -6683,31 +6066,6 @@
           <a:prstGeom prst="rect">
             <a:avLst/>
           </a:prstGeom>
-          <a:solidFill>
-            <a:srgbClr val="0D9488"/>
-          </a:solidFill>
-          <a:ln w="12700">
-            <a:solidFill>
-              <a:srgbClr val="0D9488"/>
-            </a:solidFill>
-            <a:prstDash val="solid"/>
-          </a:ln>
-        </p:spPr>
-      </p:sp>
-      <p:sp>
-        <p:nvSpPr>
-          <p:cNvPr id="18" name="Text 16"/>
-          <p:cNvSpPr/>
-          <p:nvPr/>
-        </p:nvSpPr>
-        <p:spPr>
-          <a:xfrm>
-            <a:off x="320040" y="2907792"/>
-            <a:ext cx="256032" cy="256032"/>
-          </a:xfrm>
-          <a:prstGeom prst="rect">
-            <a:avLst/>
-          </a:prstGeom>
           <a:noFill/>
           <a:ln/>
         </p:spPr>
@@ -6738,7 +6096,7 @@
         </p:nvSpPr>
         <p:spPr>
           <a:xfrm>
-            <a:off x="658368" y="2898648"/>
+            <a:off x="658368" y="2386584"/>
             <a:ext cx="8229600" cy="475488"/>
           </a:xfrm>
           <a:prstGeom prst="rect">
@@ -6771,7 +6129,7 @@
       </p:sp>
       <p:sp>
         <p:nvSpPr>
-          <p:cNvPr id="20" name="Shape 18"/>
+          <p:cNvPr id="21" name="Text 19"/>
           <p:cNvSpPr/>
           <p:nvPr/>
         </p:nvSpPr>
@@ -6783,31 +6141,6 @@
           <a:prstGeom prst="rect">
             <a:avLst/>
           </a:prstGeom>
-          <a:solidFill>
-            <a:srgbClr val="0D9488"/>
-          </a:solidFill>
-          <a:ln w="12700">
-            <a:solidFill>
-              <a:srgbClr val="0D9488"/>
-            </a:solidFill>
-            <a:prstDash val="solid"/>
-          </a:ln>
-        </p:spPr>
-      </p:sp>
-      <p:sp>
-        <p:nvSpPr>
-          <p:cNvPr id="21" name="Text 19"/>
-          <p:cNvSpPr/>
-          <p:nvPr/>
-        </p:nvSpPr>
-        <p:spPr>
-          <a:xfrm>
-            <a:off x="320040" y="3447288"/>
-            <a:ext cx="256032" cy="256032"/>
-          </a:xfrm>
-          <a:prstGeom prst="rect">
-            <a:avLst/>
-          </a:prstGeom>
           <a:noFill/>
           <a:ln/>
         </p:spPr>
@@ -6832,46 +6165,7 @@
       </p:sp>
       <p:sp>
         <p:nvSpPr>
-          <p:cNvPr id="22" name="Text 20"/>
-          <p:cNvSpPr/>
-          <p:nvPr/>
-        </p:nvSpPr>
-        <p:spPr>
-          <a:xfrm>
-            <a:off x="658368" y="3438144"/>
-            <a:ext cx="8229600" cy="475488"/>
-          </a:xfrm>
-          <a:prstGeom prst="rect">
-            <a:avLst/>
-          </a:prstGeom>
-          <a:noFill/>
-          <a:ln/>
-        </p:spPr>
-        <p:txBody>
-          <a:bodyPr wrap="square" lIns="0" tIns="0" rIns="0" bIns="0" rtlCol="0" anchor="t"/>
-          <a:lstStyle/>
-          <a:p>
-            <a:pPr marL="0" indent="0">
-              <a:buNone/>
-            </a:pPr>
-            <a:r>
-              <a:rPr lang="en-US" sz="900" dirty="0">
-                <a:solidFill>
-                  <a:srgbClr val="475569"/>
-                </a:solidFill>
-                <a:latin typeface="Calibri" pitchFamily="34" charset="0"/>
-                <a:ea typeface="Calibri" pitchFamily="34" charset="-122"/>
-                <a:cs typeface="Calibri" pitchFamily="34" charset="-120"/>
-              </a:rPr>
-              <a:t>Posner, G. J., Strike, K. A., Hewson, P. W., &amp; Gertzog, W. A. (1982). Accommodation of a scientific conception: Toward a theory of conceptual change. Science Education, 66(2), 211–227.</a:t>
-            </a:r>
-            <a:endParaRPr lang="en-US" sz="900" dirty="0"/>
-          </a:p>
-        </p:txBody>
-      </p:sp>
-      <p:sp>
-        <p:nvSpPr>
-          <p:cNvPr id="23" name="Shape 21"/>
+          <p:cNvPr id="24" name="Text 22"/>
           <p:cNvSpPr/>
           <p:nvPr/>
         </p:nvSpPr>
@@ -6883,31 +6177,6 @@
           <a:prstGeom prst="rect">
             <a:avLst/>
           </a:prstGeom>
-          <a:solidFill>
-            <a:srgbClr val="0D9488"/>
-          </a:solidFill>
-          <a:ln w="12700">
-            <a:solidFill>
-              <a:srgbClr val="0D9488"/>
-            </a:solidFill>
-            <a:prstDash val="solid"/>
-          </a:ln>
-        </p:spPr>
-      </p:sp>
-      <p:sp>
-        <p:nvSpPr>
-          <p:cNvPr id="24" name="Text 22"/>
-          <p:cNvSpPr/>
-          <p:nvPr/>
-        </p:nvSpPr>
-        <p:spPr>
-          <a:xfrm>
-            <a:off x="320040" y="3986784"/>
-            <a:ext cx="256032" cy="256032"/>
-          </a:xfrm>
-          <a:prstGeom prst="rect">
-            <a:avLst/>
-          </a:prstGeom>
           <a:noFill/>
           <a:ln/>
         </p:spPr>
@@ -6932,46 +6201,7 @@
       </p:sp>
       <p:sp>
         <p:nvSpPr>
-          <p:cNvPr id="25" name="Text 23"/>
-          <p:cNvSpPr/>
-          <p:nvPr/>
-        </p:nvSpPr>
-        <p:spPr>
-          <a:xfrm>
-            <a:off x="658368" y="3977640"/>
-            <a:ext cx="8229600" cy="475488"/>
-          </a:xfrm>
-          <a:prstGeom prst="rect">
-            <a:avLst/>
-          </a:prstGeom>
-          <a:noFill/>
-          <a:ln/>
-        </p:spPr>
-        <p:txBody>
-          <a:bodyPr wrap="square" lIns="0" tIns="0" rIns="0" bIns="0" rtlCol="0" anchor="t"/>
-          <a:lstStyle/>
-          <a:p>
-            <a:pPr marL="0" indent="0">
-              <a:buNone/>
-            </a:pPr>
-            <a:r>
-              <a:rPr lang="en-US" sz="900" dirty="0">
-                <a:solidFill>
-                  <a:srgbClr val="475569"/>
-                </a:solidFill>
-                <a:latin typeface="Calibri" pitchFamily="34" charset="0"/>
-                <a:ea typeface="Calibri" pitchFamily="34" charset="-122"/>
-                <a:cs typeface="Calibri" pitchFamily="34" charset="-120"/>
-              </a:rPr>
-              <a:t>Nisbet, M. C., &amp; Scheufele, D. A. (2009). What's next for science communication? Promising directions and lingering distractions. American Journal of Botany, 96(10), 1767–1778.</a:t>
-            </a:r>
-            <a:endParaRPr lang="en-US" sz="900" dirty="0"/>
-          </a:p>
-        </p:txBody>
-      </p:sp>
-      <p:sp>
-        <p:nvSpPr>
-          <p:cNvPr id="26" name="Shape 24"/>
+          <p:cNvPr id="27" name="Text 25"/>
           <p:cNvSpPr/>
           <p:nvPr/>
         </p:nvSpPr>
@@ -6983,31 +6213,6 @@
           <a:prstGeom prst="rect">
             <a:avLst/>
           </a:prstGeom>
-          <a:solidFill>
-            <a:srgbClr val="0D9488"/>
-          </a:solidFill>
-          <a:ln w="12700">
-            <a:solidFill>
-              <a:srgbClr val="0D9488"/>
-            </a:solidFill>
-            <a:prstDash val="solid"/>
-          </a:ln>
-        </p:spPr>
-      </p:sp>
-      <p:sp>
-        <p:nvSpPr>
-          <p:cNvPr id="27" name="Text 25"/>
-          <p:cNvSpPr/>
-          <p:nvPr/>
-        </p:nvSpPr>
-        <p:spPr>
-          <a:xfrm>
-            <a:off x="320040" y="4526280"/>
-            <a:ext cx="256032" cy="256032"/>
-          </a:xfrm>
-          <a:prstGeom prst="rect">
-            <a:avLst/>
-          </a:prstGeom>
           <a:noFill/>
           <a:ln/>
         </p:spPr>
@@ -7025,45 +6230,6 @@
                 </a:solidFill>
               </a:rPr>
               <a:t>8</a:t>
-            </a:r>
-            <a:endParaRPr lang="en-US" sz="900" dirty="0"/>
-          </a:p>
-        </p:txBody>
-      </p:sp>
-      <p:sp>
-        <p:nvSpPr>
-          <p:cNvPr id="28" name="Text 26"/>
-          <p:cNvSpPr/>
-          <p:nvPr/>
-        </p:nvSpPr>
-        <p:spPr>
-          <a:xfrm>
-            <a:off x="658368" y="4517136"/>
-            <a:ext cx="8229600" cy="475488"/>
-          </a:xfrm>
-          <a:prstGeom prst="rect">
-            <a:avLst/>
-          </a:prstGeom>
-          <a:noFill/>
-          <a:ln/>
-        </p:spPr>
-        <p:txBody>
-          <a:bodyPr wrap="square" lIns="0" tIns="0" rIns="0" bIns="0" rtlCol="0" anchor="t"/>
-          <a:lstStyle/>
-          <a:p>
-            <a:pPr marL="0" indent="0">
-              <a:buNone/>
-            </a:pPr>
-            <a:r>
-              <a:rPr lang="en-US" sz="900" dirty="0">
-                <a:solidFill>
-                  <a:srgbClr val="475569"/>
-                </a:solidFill>
-                <a:latin typeface="Calibri" pitchFamily="34" charset="0"/>
-                <a:ea typeface="Calibri" pitchFamily="34" charset="-122"/>
-                <a:cs typeface="Calibri" pitchFamily="34" charset="-120"/>
-              </a:rPr>
-              <a:t>IPCC (2014). Climate Change 2014: Synthesis Report. Contribution of Working Groups I, II and III to the Fifth Assessment Report. IPCC, Geneva.</a:t>
             </a:r>
             <a:endParaRPr lang="en-US" sz="900" dirty="0"/>
           </a:p>
@@ -7077,7 +6243,7 @@
 </p:sld>
 </file>
 
-<file path=ppt/slides/slide15.xml><?xml version="1.0" encoding="utf-8"?>
+<file path=ppt/slides/slide14.xml><?xml version="1.0" encoding="utf-8"?>
 <p:sld xmlns:a="http://schemas.openxmlformats.org/drawingml/2006/main" xmlns:r="http://schemas.openxmlformats.org/officeDocument/2006/relationships" xmlns:p="http://schemas.openxmlformats.org/presentationml/2006/main">
   <p:cSld name="Slide 15">
     <p:bg>
@@ -7415,7 +6581,7 @@
                   <a:srgbClr val="94A3B8"/>
                 </a:solidFill>
               </a:rPr>
-              <a:t>15</a:t>
+              <a:t>14</a:t>
             </a:r>
             <a:endParaRPr lang="en-US" sz="1000" dirty="0"/>
           </a:p>
@@ -7506,7 +6672,7 @@
             <a:r>
               <a:rPr lang="en-US" sz="2200" b="1" kern="0" spc="100" dirty="0">
                 <a:solidFill>
-                  <a:srgbClr val="FFFFFF"/>
+                  <a:sysClr val="windowText" lastClr="000000"/>
                 </a:solidFill>
                 <a:latin typeface="Calibri" pitchFamily="34" charset="0"/>
                 <a:ea typeface="Calibri" pitchFamily="34" charset="-122"/>
@@ -7514,7 +6680,11 @@
               </a:rPr>
               <a:t>PRESENTATION AGENDA</a:t>
             </a:r>
-            <a:endParaRPr lang="en-US" sz="2200" dirty="0"/>
+            <a:endParaRPr lang="en-US" sz="2200" dirty="0">
+              <a:solidFill>
+                <a:sysClr val="windowText" lastClr="000000"/>
+              </a:solidFill>
+            </a:endParaRPr>
           </a:p>
         </p:txBody>
       </p:sp>
@@ -8533,7 +7703,7 @@
             <a:r>
               <a:rPr lang="en-US" sz="2200" b="1" kern="0" spc="100" dirty="0">
                 <a:solidFill>
-                  <a:srgbClr val="FFFFFF"/>
+                  <a:sysClr val="windowText" lastClr="000000"/>
                 </a:solidFill>
                 <a:latin typeface="Calibri" pitchFamily="34" charset="0"/>
                 <a:ea typeface="Calibri" pitchFamily="34" charset="-122"/>
@@ -8541,7 +7711,11 @@
               </a:rPr>
               <a:t>THE PROBLEM: WHY INFORMATION ALONE FAILS</a:t>
             </a:r>
-            <a:endParaRPr lang="en-US" sz="2200" dirty="0"/>
+            <a:endParaRPr lang="en-US" sz="2200" dirty="0">
+              <a:solidFill>
+                <a:sysClr val="windowText" lastClr="000000"/>
+              </a:solidFill>
+            </a:endParaRPr>
           </a:p>
         </p:txBody>
       </p:sp>
@@ -9509,7 +8683,7 @@
             <a:r>
               <a:rPr lang="en-US" sz="2200" b="1" kern="0" spc="100" dirty="0">
                 <a:solidFill>
-                  <a:srgbClr val="FFFFFF"/>
+                  <a:sysClr val="windowText" lastClr="000000"/>
                 </a:solidFill>
                 <a:latin typeface="Calibri" pitchFamily="34" charset="0"/>
                 <a:ea typeface="Calibri" pitchFamily="34" charset="-122"/>
@@ -9517,7 +8691,11 @@
               </a:rPr>
               <a:t>THE WORLD CLIMATE SIMULATION</a:t>
             </a:r>
-            <a:endParaRPr lang="en-US" sz="2200" dirty="0"/>
+            <a:endParaRPr lang="en-US" sz="2200" dirty="0">
+              <a:solidFill>
+                <a:sysClr val="windowText" lastClr="000000"/>
+              </a:solidFill>
+            </a:endParaRPr>
           </a:p>
         </p:txBody>
       </p:sp>
@@ -10793,7 +9971,7 @@
             <a:r>
               <a:rPr lang="en-US" sz="2200" b="1" kern="0" spc="100" dirty="0">
                 <a:solidFill>
-                  <a:srgbClr val="FFFFFF"/>
+                  <a:sysClr val="windowText" lastClr="000000"/>
                 </a:solidFill>
                 <a:latin typeface="Calibri" pitchFamily="34" charset="0"/>
                 <a:ea typeface="Calibri" pitchFamily="34" charset="-122"/>
@@ -10801,7 +9979,11 @@
               </a:rPr>
               <a:t>METHODOLOGY: RESEARCH DESIGN</a:t>
             </a:r>
-            <a:endParaRPr lang="en-US" sz="2200" dirty="0"/>
+            <a:endParaRPr lang="en-US" sz="2200" dirty="0">
+              <a:solidFill>
+                <a:sysClr val="windowText" lastClr="000000"/>
+              </a:solidFill>
+            </a:endParaRPr>
           </a:p>
         </p:txBody>
       </p:sp>
@@ -12573,7 +11755,7 @@
             <a:r>
               <a:rPr lang="en-US" sz="2200" b="1" kern="0" spc="100" dirty="0">
                 <a:solidFill>
-                  <a:srgbClr val="FFFFFF"/>
+                  <a:sysClr val="windowText" lastClr="000000"/>
                 </a:solidFill>
                 <a:latin typeface="Calibri" pitchFamily="34" charset="0"/>
                 <a:ea typeface="Calibri" pitchFamily="34" charset="-122"/>
@@ -12581,7 +11763,11 @@
               </a:rPr>
               <a:t>KEY FINDINGS: STATISTICALLY SIGNIFICANT GAINS</a:t>
             </a:r>
-            <a:endParaRPr lang="en-US" sz="2200" dirty="0"/>
+            <a:endParaRPr lang="en-US" sz="2200" dirty="0">
+              <a:solidFill>
+                <a:sysClr val="windowText" lastClr="000000"/>
+              </a:solidFill>
+            </a:endParaRPr>
           </a:p>
         </p:txBody>
       </p:sp>
@@ -13127,7 +12313,7 @@
             <a:r>
               <a:rPr lang="en-US" sz="2200" b="1" kern="0" spc="100" dirty="0">
                 <a:solidFill>
-                  <a:srgbClr val="FFFFFF"/>
+                  <a:sysClr val="windowText" lastClr="000000"/>
                 </a:solidFill>
                 <a:latin typeface="Calibri" pitchFamily="34" charset="0"/>
                 <a:ea typeface="Calibri" pitchFamily="34" charset="-122"/>
@@ -13135,7 +12321,11 @@
               </a:rPr>
               <a:t>THE ACTION RESEARCH LINK: ITERATIVE IMPROVEMENT</a:t>
             </a:r>
-            <a:endParaRPr lang="en-US" sz="2200" dirty="0"/>
+            <a:endParaRPr lang="en-US" sz="2200" dirty="0">
+              <a:solidFill>
+                <a:sysClr val="windowText" lastClr="000000"/>
+              </a:solidFill>
+            </a:endParaRPr>
           </a:p>
         </p:txBody>
       </p:sp>
@@ -13183,7 +12373,7 @@
         </p:nvSpPr>
         <p:spPr>
           <a:xfrm>
-            <a:off x="3200400" y="2194560"/>
+            <a:off x="2958860" y="2194560"/>
             <a:ext cx="2743200" cy="1051560"/>
           </a:xfrm>
           <a:prstGeom prst="ellipse">
@@ -13208,7 +12398,7 @@
         </p:nvSpPr>
         <p:spPr>
           <a:xfrm>
-            <a:off x="3200400" y="2194560"/>
+            <a:off x="2958860" y="2140968"/>
             <a:ext cx="2743200" cy="1051560"/>
           </a:xfrm>
           <a:prstGeom prst="rect">
@@ -13281,7 +12471,7 @@
         </p:nvSpPr>
         <p:spPr>
           <a:xfrm>
-            <a:off x="320040" y="1417320"/>
+            <a:off x="137160" y="923543"/>
             <a:ext cx="3977640" cy="1143000"/>
           </a:xfrm>
           <a:prstGeom prst="rect">
@@ -13304,6 +12494,13 @@
             </a:outerShdw>
           </a:effectLst>
         </p:spPr>
+        <p:txBody>
+          <a:bodyPr/>
+          <a:lstStyle/>
+          <a:p>
+            <a:endParaRPr lang="en-TR"/>
+          </a:p>
+        </p:txBody>
       </p:sp>
       <p:sp>
         <p:nvSpPr>
@@ -13313,7 +12510,7 @@
         </p:nvSpPr>
         <p:spPr>
           <a:xfrm>
-            <a:off x="320040" y="1417320"/>
+            <a:off x="137160" y="928116"/>
             <a:ext cx="3977640" cy="54864"/>
           </a:xfrm>
           <a:prstGeom prst="rect">
@@ -13338,7 +12535,7 @@
         </p:nvSpPr>
         <p:spPr>
           <a:xfrm>
-            <a:off x="429768" y="1545336"/>
+            <a:off x="210312" y="1081278"/>
             <a:ext cx="347472" cy="347472"/>
           </a:xfrm>
           <a:prstGeom prst="ellipse">
@@ -13354,6 +12551,13 @@
             <a:prstDash val="solid"/>
           </a:ln>
         </p:spPr>
+        <p:txBody>
+          <a:bodyPr/>
+          <a:lstStyle/>
+          <a:p>
+            <a:endParaRPr lang="en-TR"/>
+          </a:p>
+        </p:txBody>
       </p:sp>
       <p:sp>
         <p:nvSpPr>
@@ -13363,7 +12567,7 @@
         </p:nvSpPr>
         <p:spPr>
           <a:xfrm>
-            <a:off x="429768" y="1545336"/>
+            <a:off x="219456" y="1078991"/>
             <a:ext cx="347472" cy="347472"/>
           </a:xfrm>
           <a:prstGeom prst="rect">
@@ -13399,7 +12603,7 @@
         </p:nvSpPr>
         <p:spPr>
           <a:xfrm>
-            <a:off x="868680" y="1527048"/>
+            <a:off x="649224" y="1078992"/>
             <a:ext cx="3291840" cy="274320"/>
           </a:xfrm>
           <a:prstGeom prst="rect">
@@ -13438,7 +12642,7 @@
         </p:nvSpPr>
         <p:spPr>
           <a:xfrm>
-            <a:off x="429768" y="1874520"/>
+            <a:off x="449581" y="1455419"/>
             <a:ext cx="3749040" cy="621792"/>
           </a:xfrm>
           <a:prstGeom prst="rect">
@@ -13634,7 +12838,7 @@
         </p:nvSpPr>
         <p:spPr>
           <a:xfrm>
-            <a:off x="4590288" y="1371600"/>
+            <a:off x="4669991" y="1396367"/>
             <a:ext cx="3749040" cy="621792"/>
           </a:xfrm>
           <a:prstGeom prst="rect">
@@ -13673,7 +12877,7 @@
         </p:nvSpPr>
         <p:spPr>
           <a:xfrm>
-            <a:off x="4846320" y="2788920"/>
+            <a:off x="4572000" y="3499866"/>
             <a:ext cx="3977640" cy="1143000"/>
           </a:xfrm>
           <a:prstGeom prst="rect">
@@ -13696,6 +12900,13 @@
             </a:outerShdw>
           </a:effectLst>
         </p:spPr>
+        <p:txBody>
+          <a:bodyPr/>
+          <a:lstStyle/>
+          <a:p>
+            <a:endParaRPr lang="en-TR" dirty="0"/>
+          </a:p>
+        </p:txBody>
       </p:sp>
       <p:sp>
         <p:nvSpPr>
@@ -13705,7 +12916,7 @@
         </p:nvSpPr>
         <p:spPr>
           <a:xfrm>
-            <a:off x="4846320" y="2788920"/>
+            <a:off x="4565098" y="3489579"/>
             <a:ext cx="3977640" cy="54864"/>
           </a:xfrm>
           <a:prstGeom prst="rect">
@@ -13730,7 +12941,7 @@
         </p:nvSpPr>
         <p:spPr>
           <a:xfrm>
-            <a:off x="4956048" y="2916936"/>
+            <a:off x="4669991" y="3569210"/>
             <a:ext cx="347472" cy="347472"/>
           </a:xfrm>
           <a:prstGeom prst="ellipse">
@@ -13746,6 +12957,13 @@
             <a:prstDash val="solid"/>
           </a:ln>
         </p:spPr>
+        <p:txBody>
+          <a:bodyPr/>
+          <a:lstStyle/>
+          <a:p>
+            <a:endParaRPr lang="en-TR" dirty="0"/>
+          </a:p>
+        </p:txBody>
       </p:sp>
       <p:sp>
         <p:nvSpPr>
@@ -13755,7 +12973,7 @@
         </p:nvSpPr>
         <p:spPr>
           <a:xfrm>
-            <a:off x="4956048" y="2916936"/>
+            <a:off x="4669991" y="3569210"/>
             <a:ext cx="347472" cy="347472"/>
           </a:xfrm>
           <a:prstGeom prst="rect">
@@ -13791,7 +13009,7 @@
         </p:nvSpPr>
         <p:spPr>
           <a:xfrm>
-            <a:off x="5394960" y="2898648"/>
+            <a:off x="5115454" y="3579305"/>
             <a:ext cx="3291840" cy="274320"/>
           </a:xfrm>
           <a:prstGeom prst="rect">
@@ -13830,7 +13048,7 @@
         </p:nvSpPr>
         <p:spPr>
           <a:xfrm>
-            <a:off x="4956048" y="3246120"/>
+            <a:off x="4843727" y="3951544"/>
             <a:ext cx="3749040" cy="621792"/>
           </a:xfrm>
           <a:prstGeom prst="rect">
@@ -13869,7 +13087,7 @@
         </p:nvSpPr>
         <p:spPr>
           <a:xfrm>
-            <a:off x="320040" y="3474720"/>
+            <a:off x="137160" y="3529584"/>
             <a:ext cx="3977640" cy="1143000"/>
           </a:xfrm>
           <a:prstGeom prst="rect">
@@ -13892,6 +13110,13 @@
             </a:outerShdw>
           </a:effectLst>
         </p:spPr>
+        <p:txBody>
+          <a:bodyPr/>
+          <a:lstStyle/>
+          <a:p>
+            <a:endParaRPr lang="en-TR" dirty="0"/>
+          </a:p>
+        </p:txBody>
       </p:sp>
       <p:sp>
         <p:nvSpPr>
@@ -13901,7 +13126,7 @@
         </p:nvSpPr>
         <p:spPr>
           <a:xfrm>
-            <a:off x="320040" y="3474720"/>
+            <a:off x="137160" y="3474720"/>
             <a:ext cx="3977640" cy="54864"/>
           </a:xfrm>
           <a:prstGeom prst="rect">
@@ -13926,7 +13151,7 @@
         </p:nvSpPr>
         <p:spPr>
           <a:xfrm>
-            <a:off x="429768" y="3602736"/>
+            <a:off x="162350" y="3570732"/>
             <a:ext cx="347472" cy="347472"/>
           </a:xfrm>
           <a:prstGeom prst="ellipse">
@@ -13951,7 +13176,7 @@
         </p:nvSpPr>
         <p:spPr>
           <a:xfrm>
-            <a:off x="429768" y="3602736"/>
+            <a:off x="155448" y="3560826"/>
             <a:ext cx="347472" cy="347472"/>
           </a:xfrm>
           <a:prstGeom prst="rect">
@@ -13987,7 +13212,7 @@
         </p:nvSpPr>
         <p:spPr>
           <a:xfrm>
-            <a:off x="868680" y="3584448"/>
+            <a:off x="587458" y="3570732"/>
             <a:ext cx="3291840" cy="274320"/>
           </a:xfrm>
           <a:prstGeom prst="rect">
@@ -14056,102 +13281,6 @@
             <a:endParaRPr lang="en-US" sz="1000" dirty="0"/>
           </a:p>
         </p:txBody>
-      </p:sp>
-      <p:sp>
-        <p:nvSpPr>
-          <p:cNvPr id="31" name="Shape 29"/>
-          <p:cNvSpPr/>
-          <p:nvPr/>
-        </p:nvSpPr>
-        <p:spPr>
-          <a:xfrm rot="-1800000">
-            <a:off x="4297680" y="1920240"/>
-            <a:ext cx="731520" cy="0"/>
-          </a:xfrm>
-          <a:prstGeom prst="line">
-            <a:avLst/>
-          </a:prstGeom>
-          <a:noFill/>
-          <a:ln w="19050">
-            <a:solidFill>
-              <a:srgbClr val="0D9488"/>
-            </a:solidFill>
-            <a:prstDash val="solid"/>
-            <a:tailEnd type="none"/>
-          </a:ln>
-        </p:spPr>
-      </p:sp>
-      <p:sp>
-        <p:nvSpPr>
-          <p:cNvPr id="32" name="Shape 30"/>
-          <p:cNvSpPr/>
-          <p:nvPr/>
-        </p:nvSpPr>
-        <p:spPr>
-          <a:xfrm rot="5400000">
-            <a:off x="5943600" y="2066544"/>
-            <a:ext cx="731520" cy="0"/>
-          </a:xfrm>
-          <a:prstGeom prst="line">
-            <a:avLst/>
-          </a:prstGeom>
-          <a:noFill/>
-          <a:ln w="19050">
-            <a:solidFill>
-              <a:srgbClr val="0D9488"/>
-            </a:solidFill>
-            <a:prstDash val="solid"/>
-            <a:tailEnd type="none"/>
-          </a:ln>
-        </p:spPr>
-      </p:sp>
-      <p:sp>
-        <p:nvSpPr>
-          <p:cNvPr id="33" name="Shape 31"/>
-          <p:cNvSpPr/>
-          <p:nvPr/>
-        </p:nvSpPr>
-        <p:spPr>
-          <a:xfrm rot="9000000">
-            <a:off x="4114800" y="4041648"/>
-            <a:ext cx="731520" cy="0"/>
-          </a:xfrm>
-          <a:prstGeom prst="line">
-            <a:avLst/>
-          </a:prstGeom>
-          <a:noFill/>
-          <a:ln w="19050">
-            <a:solidFill>
-              <a:srgbClr val="0D9488"/>
-            </a:solidFill>
-            <a:prstDash val="solid"/>
-            <a:tailEnd type="none"/>
-          </a:ln>
-        </p:spPr>
-      </p:sp>
-      <p:sp>
-        <p:nvSpPr>
-          <p:cNvPr id="34" name="Shape 32"/>
-          <p:cNvSpPr/>
-          <p:nvPr/>
-        </p:nvSpPr>
-        <p:spPr>
-          <a:xfrm rot="16200000">
-            <a:off x="1965960" y="2834640"/>
-            <a:ext cx="731520" cy="0"/>
-          </a:xfrm>
-          <a:prstGeom prst="line">
-            <a:avLst/>
-          </a:prstGeom>
-          <a:noFill/>
-          <a:ln w="19050">
-            <a:solidFill>
-              <a:srgbClr val="0D9488"/>
-            </a:solidFill>
-            <a:prstDash val="solid"/>
-            <a:tailEnd type="none"/>
-          </a:ln>
-        </p:spPr>
       </p:sp>
     </p:spTree>
   </p:cSld>
@@ -14238,7 +13367,7 @@
             <a:r>
               <a:rPr lang="en-US" sz="2200" b="1" kern="0" spc="100" dirty="0">
                 <a:solidFill>
-                  <a:srgbClr val="FFFFFF"/>
+                  <a:sysClr val="windowText" lastClr="000000"/>
                 </a:solidFill>
                 <a:latin typeface="Calibri" pitchFamily="34" charset="0"/>
                 <a:ea typeface="Calibri" pitchFamily="34" charset="-122"/>
@@ -14246,7 +13375,11 @@
               </a:rPr>
               <a:t>IMPLICATIONS FOR EDUCATION &amp; POLICY</a:t>
             </a:r>
-            <a:endParaRPr lang="en-US" sz="2200" dirty="0"/>
+            <a:endParaRPr lang="en-US" sz="2200" dirty="0">
+              <a:solidFill>
+                <a:sysClr val="windowText" lastClr="000000"/>
+              </a:solidFill>
+            </a:endParaRPr>
           </a:p>
         </p:txBody>
       </p:sp>
